--- a/chapter8/chapter8.pptx
+++ b/chapter8/chapter8.pptx
@@ -10087,10 +10087,12 @@
           </a:bodyPr>
           <a:lstStyle/>
           <a:p>
-            <a:pPr>
+            <a:pPr lvl="0" marL="457200" indent="-228600">
+              <a:buFont typeface="Calibri"/>
               <a:spcAft>
                 <a:spcPts val="1000"/>
               </a:spcAft>
+              <a:buSzPct val="100000"/>
               <a:buChar char="•"/>
               <a:lnSpc>
                 <a:spcPts val="2200"/>
@@ -10107,10 +10109,12 @@
             </a:r>
           </a:p>
           <a:p>
-            <a:pPr>
+            <a:pPr lvl="0" marL="457200" indent="-228600">
+              <a:buFont typeface="Calibri"/>
               <a:spcAft>
                 <a:spcPts val="1000"/>
               </a:spcAft>
+              <a:buSzPct val="100000"/>
               <a:buChar char="•"/>
               <a:lnSpc>
                 <a:spcPts val="2200"/>
@@ -10246,10 +10250,12 @@
           </a:bodyPr>
           <a:lstStyle/>
           <a:p>
-            <a:pPr>
+            <a:pPr lvl="0" marL="457200" indent="-228600">
+              <a:buFont typeface="Calibri"/>
               <a:spcAft>
                 <a:spcPts val="1000"/>
               </a:spcAft>
+              <a:buSzPct val="100000"/>
               <a:buChar char="•"/>
               <a:lnSpc>
                 <a:spcPts val="2200"/>
@@ -10266,10 +10272,12 @@
             </a:r>
           </a:p>
           <a:p>
-            <a:pPr>
+            <a:pPr lvl="0" marL="457200" indent="-228600">
+              <a:buFont typeface="Calibri"/>
               <a:spcAft>
                 <a:spcPts val="1000"/>
               </a:spcAft>
+              <a:buSzPct val="100000"/>
               <a:buChar char="•"/>
               <a:lnSpc>
                 <a:spcPts val="2200"/>
@@ -10286,10 +10294,12 @@
             </a:r>
           </a:p>
           <a:p>
-            <a:pPr>
+            <a:pPr lvl="0" marL="457200" indent="-228600">
+              <a:buFont typeface="Calibri"/>
               <a:spcAft>
                 <a:spcPts val="1000"/>
               </a:spcAft>
+              <a:buSzPct val="100000"/>
               <a:buChar char="•"/>
               <a:lnSpc>
                 <a:spcPts val="2200"/>
@@ -10425,10 +10435,12 @@
           </a:bodyPr>
           <a:lstStyle/>
           <a:p>
-            <a:pPr>
+            <a:pPr lvl="0" marL="457200" indent="-228600">
+              <a:buFont typeface="Calibri"/>
               <a:spcAft>
                 <a:spcPts val="1000"/>
               </a:spcAft>
+              <a:buSzPct val="100000"/>
               <a:buChar char="•"/>
               <a:lnSpc>
                 <a:spcPts val="2200"/>
@@ -10445,10 +10457,12 @@
             </a:r>
           </a:p>
           <a:p>
-            <a:pPr>
+            <a:pPr lvl="0" marL="457200" indent="-228600">
+              <a:buFont typeface="Calibri"/>
               <a:spcAft>
                 <a:spcPts val="1000"/>
               </a:spcAft>
+              <a:buSzPct val="100000"/>
               <a:buChar char="•"/>
               <a:lnSpc>
                 <a:spcPts val="2200"/>
@@ -10584,10 +10598,12 @@
           </a:bodyPr>
           <a:lstStyle/>
           <a:p>
-            <a:pPr>
+            <a:pPr lvl="0" marL="457200" indent="-228600">
+              <a:buFont typeface="Calibri"/>
               <a:spcAft>
                 <a:spcPts val="1000"/>
               </a:spcAft>
+              <a:buSzPct val="100000"/>
               <a:buChar char="•"/>
               <a:lnSpc>
                 <a:spcPts val="2200"/>
@@ -10723,10 +10739,12 @@
           </a:bodyPr>
           <a:lstStyle/>
           <a:p>
-            <a:pPr>
+            <a:pPr lvl="0" marL="457200" indent="-228600">
+              <a:buFont typeface="Calibri"/>
               <a:spcAft>
                 <a:spcPts val="1000"/>
               </a:spcAft>
+              <a:buSzPct val="100000"/>
               <a:buChar char="•"/>
               <a:lnSpc>
                 <a:spcPts val="2200"/>
@@ -10743,10 +10761,12 @@
             </a:r>
           </a:p>
           <a:p>
-            <a:pPr>
+            <a:pPr lvl="0" marL="457200" indent="-228600">
+              <a:buFont typeface="Calibri"/>
               <a:spcAft>
                 <a:spcPts val="1000"/>
               </a:spcAft>
+              <a:buSzPct val="100000"/>
               <a:buChar char="•"/>
               <a:lnSpc>
                 <a:spcPts val="2200"/>
@@ -10763,10 +10783,12 @@
             </a:r>
           </a:p>
           <a:p>
-            <a:pPr>
+            <a:pPr lvl="0" marL="457200" indent="-228600">
+              <a:buFont typeface="Calibri"/>
               <a:spcAft>
                 <a:spcPts val="1000"/>
               </a:spcAft>
+              <a:buSzPct val="100000"/>
               <a:buChar char="•"/>
               <a:lnSpc>
                 <a:spcPts val="2200"/>
@@ -10902,10 +10924,12 @@
           </a:bodyPr>
           <a:lstStyle/>
           <a:p>
-            <a:pPr>
+            <a:pPr lvl="0" marL="457200" indent="-228600">
+              <a:buFont typeface="Calibri"/>
               <a:spcAft>
                 <a:spcPts val="1000"/>
               </a:spcAft>
+              <a:buSzPct val="100000"/>
               <a:buChar char="•"/>
               <a:lnSpc>
                 <a:spcPts val="2200"/>
@@ -10922,10 +10946,12 @@
             </a:r>
           </a:p>
           <a:p>
-            <a:pPr>
+            <a:pPr lvl="0" marL="457200" indent="-228600">
+              <a:buFont typeface="Calibri"/>
               <a:spcAft>
                 <a:spcPts val="1000"/>
               </a:spcAft>
+              <a:buSzPct val="100000"/>
               <a:buChar char="•"/>
               <a:lnSpc>
                 <a:spcPts val="2200"/>
@@ -10942,10 +10968,12 @@
             </a:r>
           </a:p>
           <a:p>
-            <a:pPr>
+            <a:pPr lvl="0" marL="457200" indent="-228600">
+              <a:buFont typeface="Calibri"/>
               <a:spcAft>
                 <a:spcPts val="1000"/>
               </a:spcAft>
+              <a:buSzPct val="100000"/>
               <a:buChar char="•"/>
               <a:lnSpc>
                 <a:spcPts val="2200"/>
@@ -11081,10 +11109,12 @@
           </a:bodyPr>
           <a:lstStyle/>
           <a:p>
-            <a:pPr>
+            <a:pPr lvl="0" marL="457200" indent="-228600">
+              <a:buFont typeface="Calibri"/>
               <a:spcAft>
                 <a:spcPts val="1000"/>
               </a:spcAft>
+              <a:buSzPct val="100000"/>
               <a:buChar char="•"/>
               <a:lnSpc>
                 <a:spcPts val="2200"/>
@@ -11101,10 +11131,12 @@
             </a:r>
           </a:p>
           <a:p>
-            <a:pPr>
+            <a:pPr lvl="0" marL="457200" indent="-228600">
+              <a:buFont typeface="Calibri"/>
               <a:spcAft>
                 <a:spcPts val="1000"/>
               </a:spcAft>
+              <a:buSzPct val="100000"/>
               <a:buChar char="•"/>
               <a:lnSpc>
                 <a:spcPts val="2200"/>
@@ -11121,10 +11153,12 @@
             </a:r>
           </a:p>
           <a:p>
-            <a:pPr>
+            <a:pPr lvl="0" marL="457200" indent="-228600">
+              <a:buFont typeface="Calibri"/>
               <a:spcAft>
                 <a:spcPts val="1000"/>
               </a:spcAft>
+              <a:buSzPct val="100000"/>
               <a:buChar char="•"/>
               <a:lnSpc>
                 <a:spcPts val="2200"/>
@@ -11141,10 +11175,12 @@
             </a:r>
           </a:p>
           <a:p>
-            <a:pPr>
+            <a:pPr lvl="0" marL="457200" indent="-228600">
+              <a:buFont typeface="Calibri"/>
               <a:spcAft>
                 <a:spcPts val="1000"/>
               </a:spcAft>
+              <a:buSzPct val="100000"/>
               <a:buChar char="•"/>
               <a:lnSpc>
                 <a:spcPts val="2200"/>
@@ -11161,10 +11197,12 @@
             </a:r>
           </a:p>
           <a:p>
-            <a:pPr>
+            <a:pPr lvl="0" marL="457200" indent="-228600">
+              <a:buFont typeface="Calibri"/>
               <a:spcAft>
                 <a:spcPts val="1000"/>
               </a:spcAft>
+              <a:buSzPct val="100000"/>
               <a:buChar char="•"/>
               <a:lnSpc>
                 <a:spcPts val="2200"/>
@@ -11300,10 +11338,12 @@
           </a:bodyPr>
           <a:lstStyle/>
           <a:p>
-            <a:pPr>
+            <a:pPr lvl="0" marL="457200" indent="-228600">
+              <a:buFont typeface="Calibri"/>
               <a:spcAft>
                 <a:spcPts val="1000"/>
               </a:spcAft>
+              <a:buSzPct val="100000"/>
               <a:buChar char="•"/>
               <a:lnSpc>
                 <a:spcPts val="2200"/>
@@ -11320,10 +11360,12 @@
             </a:r>
           </a:p>
           <a:p>
-            <a:pPr>
+            <a:pPr lvl="0" marL="457200" indent="-228600">
+              <a:buFont typeface="Calibri"/>
               <a:spcAft>
                 <a:spcPts val="1000"/>
               </a:spcAft>
+              <a:buSzPct val="100000"/>
               <a:buChar char="•"/>
               <a:lnSpc>
                 <a:spcPts val="2200"/>
@@ -11340,10 +11382,12 @@
             </a:r>
           </a:p>
           <a:p>
-            <a:pPr>
+            <a:pPr lvl="0" marL="457200" indent="-228600">
+              <a:buFont typeface="Calibri"/>
               <a:spcAft>
                 <a:spcPts val="1000"/>
               </a:spcAft>
+              <a:buSzPct val="100000"/>
               <a:buChar char="•"/>
               <a:lnSpc>
                 <a:spcPts val="2200"/>
@@ -11479,10 +11523,12 @@
           </a:bodyPr>
           <a:lstStyle/>
           <a:p>
-            <a:pPr>
+            <a:pPr lvl="0" marL="457200" indent="-228600">
+              <a:buFont typeface="Calibri"/>
               <a:spcAft>
                 <a:spcPts val="1000"/>
               </a:spcAft>
+              <a:buSzPct val="100000"/>
               <a:buChar char="•"/>
               <a:lnSpc>
                 <a:spcPts val="2200"/>
@@ -11499,10 +11545,12 @@
             </a:r>
           </a:p>
           <a:p>
-            <a:pPr>
+            <a:pPr lvl="0" marL="457200" indent="-228600">
+              <a:buFont typeface="Calibri"/>
               <a:spcAft>
                 <a:spcPts val="1000"/>
               </a:spcAft>
+              <a:buSzPct val="100000"/>
               <a:buChar char="•"/>
               <a:lnSpc>
                 <a:spcPts val="2200"/>
@@ -11519,10 +11567,12 @@
             </a:r>
           </a:p>
           <a:p>
-            <a:pPr>
+            <a:pPr lvl="0" marL="457200" indent="-228600">
+              <a:buFont typeface="Calibri"/>
               <a:spcAft>
                 <a:spcPts val="1000"/>
               </a:spcAft>
+              <a:buSzPct val="100000"/>
               <a:buChar char="•"/>
               <a:lnSpc>
                 <a:spcPts val="2200"/>
@@ -11539,10 +11589,12 @@
             </a:r>
           </a:p>
           <a:p>
-            <a:pPr>
+            <a:pPr lvl="0" marL="457200" indent="-228600">
+              <a:buFont typeface="Calibri"/>
               <a:spcAft>
                 <a:spcPts val="1000"/>
               </a:spcAft>
+              <a:buSzPct val="100000"/>
               <a:buChar char="•"/>
               <a:lnSpc>
                 <a:spcPts val="2200"/>
@@ -11559,10 +11611,12 @@
             </a:r>
           </a:p>
           <a:p>
-            <a:pPr>
+            <a:pPr lvl="0" marL="457200" indent="-228600">
+              <a:buFont typeface="Calibri"/>
               <a:spcAft>
                 <a:spcPts val="1000"/>
               </a:spcAft>
+              <a:buSzPct val="100000"/>
               <a:buChar char="•"/>
               <a:lnSpc>
                 <a:spcPts val="2200"/>
@@ -11698,10 +11752,12 @@
           </a:bodyPr>
           <a:lstStyle/>
           <a:p>
-            <a:pPr>
+            <a:pPr lvl="0" marL="457200" indent="-228600">
+              <a:buFont typeface="Calibri"/>
               <a:spcAft>
                 <a:spcPts val="1000"/>
               </a:spcAft>
+              <a:buSzPct val="100000"/>
               <a:buChar char="•"/>
               <a:lnSpc>
                 <a:spcPts val="2200"/>
@@ -11718,10 +11774,12 @@
             </a:r>
           </a:p>
           <a:p>
-            <a:pPr>
+            <a:pPr lvl="0" marL="457200" indent="-228600">
+              <a:buFont typeface="Calibri"/>
               <a:spcAft>
                 <a:spcPts val="1000"/>
               </a:spcAft>
+              <a:buSzPct val="100000"/>
               <a:buChar char="•"/>
               <a:lnSpc>
                 <a:spcPts val="2200"/>
@@ -11738,10 +11796,12 @@
             </a:r>
           </a:p>
           <a:p>
-            <a:pPr>
+            <a:pPr lvl="0" marL="457200" indent="-228600">
+              <a:buFont typeface="Calibri"/>
               <a:spcAft>
                 <a:spcPts val="1000"/>
               </a:spcAft>
+              <a:buSzPct val="100000"/>
               <a:buChar char="•"/>
               <a:lnSpc>
                 <a:spcPts val="2200"/>
@@ -11758,10 +11818,12 @@
             </a:r>
           </a:p>
           <a:p>
-            <a:pPr>
+            <a:pPr lvl="0" marL="457200" indent="-228600">
+              <a:buFont typeface="Calibri"/>
               <a:spcAft>
                 <a:spcPts val="1000"/>
               </a:spcAft>
+              <a:buSzPct val="100000"/>
               <a:buChar char="•"/>
               <a:lnSpc>
                 <a:spcPts val="2200"/>
@@ -12189,10 +12251,12 @@
           </a:bodyPr>
           <a:lstStyle/>
           <a:p>
-            <a:pPr>
+            <a:pPr lvl="0" marL="457200" indent="-228600">
+              <a:buFont typeface="Calibri"/>
               <a:spcAft>
                 <a:spcPts val="1000"/>
               </a:spcAft>
+              <a:buSzPct val="100000"/>
               <a:buChar char="•"/>
               <a:lnSpc>
                 <a:spcPts val="2200"/>
@@ -12209,10 +12273,12 @@
             </a:r>
           </a:p>
           <a:p>
-            <a:pPr>
+            <a:pPr lvl="0" marL="457200" indent="-228600">
+              <a:buFont typeface="Calibri"/>
               <a:spcAft>
                 <a:spcPts val="1000"/>
               </a:spcAft>
+              <a:buSzPct val="100000"/>
               <a:buChar char="•"/>
               <a:lnSpc>
                 <a:spcPts val="2200"/>
@@ -12229,10 +12295,12 @@
             </a:r>
           </a:p>
           <a:p>
-            <a:pPr>
+            <a:pPr lvl="0" marL="457200" indent="-228600">
+              <a:buFont typeface="Calibri"/>
               <a:spcAft>
                 <a:spcPts val="1000"/>
               </a:spcAft>
+              <a:buSzPct val="100000"/>
               <a:buChar char="•"/>
               <a:lnSpc>
                 <a:spcPts val="2200"/>
@@ -12368,10 +12436,12 @@
           </a:bodyPr>
           <a:lstStyle/>
           <a:p>
-            <a:pPr>
+            <a:pPr lvl="0" marL="457200" indent="-228600">
+              <a:buFont typeface="Calibri"/>
               <a:spcAft>
                 <a:spcPts val="1000"/>
               </a:spcAft>
+              <a:buSzPct val="100000"/>
               <a:buChar char="•"/>
               <a:lnSpc>
                 <a:spcPts val="2200"/>
@@ -12507,10 +12577,12 @@
           </a:bodyPr>
           <a:lstStyle/>
           <a:p>
-            <a:pPr>
+            <a:pPr lvl="0" marL="457200" indent="-228600">
+              <a:buFont typeface="Calibri"/>
               <a:spcAft>
                 <a:spcPts val="1000"/>
               </a:spcAft>
+              <a:buSzPct val="100000"/>
               <a:buChar char="•"/>
               <a:lnSpc>
                 <a:spcPts val="2200"/>
@@ -12527,10 +12599,12 @@
             </a:r>
           </a:p>
           <a:p>
-            <a:pPr>
+            <a:pPr lvl="0" marL="457200" indent="-228600">
+              <a:buFont typeface="Calibri"/>
               <a:spcAft>
                 <a:spcPts val="1000"/>
               </a:spcAft>
+              <a:buSzPct val="100000"/>
               <a:buChar char="•"/>
               <a:lnSpc>
                 <a:spcPts val="2200"/>
@@ -12666,10 +12740,12 @@
           </a:bodyPr>
           <a:lstStyle/>
           <a:p>
-            <a:pPr>
+            <a:pPr lvl="0" marL="457200" indent="-228600">
+              <a:buFont typeface="Calibri"/>
               <a:spcAft>
                 <a:spcPts val="1000"/>
               </a:spcAft>
+              <a:buSzPct val="100000"/>
               <a:buChar char="•"/>
               <a:lnSpc>
                 <a:spcPts val="2200"/>
@@ -12805,10 +12881,12 @@
           </a:bodyPr>
           <a:lstStyle/>
           <a:p>
-            <a:pPr>
+            <a:pPr lvl="0" marL="457200" indent="-228600">
+              <a:buFont typeface="Calibri"/>
               <a:spcAft>
                 <a:spcPts val="1000"/>
               </a:spcAft>
+              <a:buSzPct val="100000"/>
               <a:buChar char="•"/>
               <a:lnSpc>
                 <a:spcPts val="2200"/>
@@ -12825,10 +12903,12 @@
             </a:r>
           </a:p>
           <a:p>
-            <a:pPr>
+            <a:pPr lvl="0" marL="457200" indent="-228600">
+              <a:buFont typeface="Calibri"/>
               <a:spcAft>
                 <a:spcPts val="1000"/>
               </a:spcAft>
+              <a:buSzPct val="100000"/>
               <a:buChar char="•"/>
               <a:lnSpc>
                 <a:spcPts val="2200"/>
@@ -12845,10 +12925,12 @@
             </a:r>
           </a:p>
           <a:p>
-            <a:pPr>
+            <a:pPr lvl="0" marL="457200" indent="-228600">
+              <a:buFont typeface="Calibri"/>
               <a:spcAft>
                 <a:spcPts val="1000"/>
               </a:spcAft>
+              <a:buSzPct val="100000"/>
               <a:buChar char="•"/>
               <a:lnSpc>
                 <a:spcPts val="2200"/>
@@ -12984,10 +13066,12 @@
           </a:bodyPr>
           <a:lstStyle/>
           <a:p>
-            <a:pPr>
+            <a:pPr lvl="0" marL="457200" indent="-228600">
+              <a:buFont typeface="Calibri"/>
               <a:spcAft>
                 <a:spcPts val="1000"/>
               </a:spcAft>
+              <a:buSzPct val="100000"/>
               <a:buChar char="•"/>
               <a:lnSpc>
                 <a:spcPts val="2200"/>
@@ -13004,10 +13088,12 @@
             </a:r>
           </a:p>
           <a:p>
-            <a:pPr>
+            <a:pPr lvl="0" marL="457200" indent="-228600">
+              <a:buFont typeface="Calibri"/>
               <a:spcAft>
                 <a:spcPts val="1000"/>
               </a:spcAft>
+              <a:buSzPct val="100000"/>
               <a:buChar char="•"/>
               <a:lnSpc>
                 <a:spcPts val="2200"/>
@@ -13024,10 +13110,12 @@
             </a:r>
           </a:p>
           <a:p>
-            <a:pPr>
+            <a:pPr lvl="0" marL="457200" indent="-228600">
+              <a:buFont typeface="Calibri"/>
               <a:spcAft>
                 <a:spcPts val="1000"/>
               </a:spcAft>
+              <a:buSzPct val="100000"/>
               <a:buChar char="•"/>
               <a:lnSpc>
                 <a:spcPts val="2200"/>
@@ -13044,10 +13132,12 @@
             </a:r>
           </a:p>
           <a:p>
-            <a:pPr>
+            <a:pPr lvl="0" marL="457200" indent="-228600">
+              <a:buFont typeface="Calibri"/>
               <a:spcAft>
                 <a:spcPts val="1000"/>
               </a:spcAft>
+              <a:buSzPct val="100000"/>
               <a:buChar char="•"/>
               <a:lnSpc>
                 <a:spcPts val="2200"/>
@@ -13399,10 +13489,12 @@
           </a:bodyPr>
           <a:lstStyle/>
           <a:p>
-            <a:pPr>
+            <a:pPr lvl="0" marL="457200" indent="-228600">
+              <a:buFont typeface="Calibri"/>
               <a:spcAft>
                 <a:spcPts val="1000"/>
               </a:spcAft>
+              <a:buSzPct val="100000"/>
               <a:buChar char="•"/>
               <a:lnSpc>
                 <a:spcPts val="2200"/>
@@ -13419,10 +13511,12 @@
             </a:r>
           </a:p>
           <a:p>
-            <a:pPr>
+            <a:pPr lvl="0" marL="457200" indent="-228600">
+              <a:buFont typeface="Calibri"/>
               <a:spcAft>
                 <a:spcPts val="1000"/>
               </a:spcAft>
+              <a:buSzPct val="100000"/>
               <a:buChar char="•"/>
               <a:lnSpc>
                 <a:spcPts val="2200"/>
@@ -13439,10 +13533,12 @@
             </a:r>
           </a:p>
           <a:p>
-            <a:pPr>
+            <a:pPr lvl="0" marL="457200" indent="-228600">
+              <a:buFont typeface="Calibri"/>
               <a:spcAft>
                 <a:spcPts val="1000"/>
               </a:spcAft>
+              <a:buSzPct val="100000"/>
               <a:buChar char="•"/>
               <a:lnSpc>
                 <a:spcPts val="2200"/>
@@ -13578,10 +13674,12 @@
           </a:bodyPr>
           <a:lstStyle/>
           <a:p>
-            <a:pPr>
+            <a:pPr lvl="0" marL="457200" indent="-228600">
+              <a:buFont typeface="Calibri"/>
               <a:spcAft>
                 <a:spcPts val="1000"/>
               </a:spcAft>
+              <a:buSzPct val="100000"/>
               <a:buChar char="•"/>
               <a:lnSpc>
                 <a:spcPts val="2200"/>
@@ -13598,10 +13696,12 @@
             </a:r>
           </a:p>
           <a:p>
-            <a:pPr>
+            <a:pPr lvl="0" marL="457200" indent="-228600">
+              <a:buFont typeface="Calibri"/>
               <a:spcAft>
                 <a:spcPts val="1000"/>
               </a:spcAft>
+              <a:buSzPct val="100000"/>
               <a:buChar char="•"/>
               <a:lnSpc>
                 <a:spcPts val="2200"/>
@@ -13618,10 +13718,12 @@
             </a:r>
           </a:p>
           <a:p>
-            <a:pPr>
+            <a:pPr lvl="0" marL="457200" indent="-228600">
+              <a:buFont typeface="Calibri"/>
               <a:spcAft>
                 <a:spcPts val="1000"/>
               </a:spcAft>
+              <a:buSzPct val="100000"/>
               <a:buChar char="•"/>
               <a:lnSpc>
                 <a:spcPts val="2200"/>
@@ -13638,10 +13740,12 @@
             </a:r>
           </a:p>
           <a:p>
-            <a:pPr>
+            <a:pPr lvl="0" marL="457200" indent="-228600">
+              <a:buFont typeface="Calibri"/>
               <a:spcAft>
                 <a:spcPts val="1000"/>
               </a:spcAft>
+              <a:buSzPct val="100000"/>
               <a:buChar char="•"/>
               <a:lnSpc>
                 <a:spcPts val="2200"/>
@@ -13658,10 +13762,12 @@
             </a:r>
           </a:p>
           <a:p>
-            <a:pPr>
+            <a:pPr lvl="0" marL="457200" indent="-228600">
+              <a:buFont typeface="Calibri"/>
               <a:spcAft>
                 <a:spcPts val="1000"/>
               </a:spcAft>
+              <a:buSzPct val="100000"/>
               <a:buChar char="•"/>
               <a:lnSpc>
                 <a:spcPts val="2200"/>
@@ -13797,10 +13903,12 @@
           </a:bodyPr>
           <a:lstStyle/>
           <a:p>
-            <a:pPr>
+            <a:pPr lvl="0" marL="457200" indent="-228600">
+              <a:buFont typeface="Calibri"/>
               <a:spcAft>
                 <a:spcPts val="1000"/>
               </a:spcAft>
+              <a:buSzPct val="100000"/>
               <a:buChar char="•"/>
               <a:lnSpc>
                 <a:spcPts val="2200"/>
@@ -13817,10 +13925,12 @@
             </a:r>
           </a:p>
           <a:p>
-            <a:pPr>
+            <a:pPr lvl="0" marL="457200" indent="-228600">
+              <a:buFont typeface="Calibri"/>
               <a:spcAft>
                 <a:spcPts val="1000"/>
               </a:spcAft>
+              <a:buSzPct val="100000"/>
               <a:buChar char="•"/>
               <a:lnSpc>
                 <a:spcPts val="2200"/>
@@ -13956,10 +14066,12 @@
           </a:bodyPr>
           <a:lstStyle/>
           <a:p>
-            <a:pPr>
+            <a:pPr lvl="0" marL="457200" indent="-228600">
+              <a:buFont typeface="Calibri"/>
               <a:spcAft>
                 <a:spcPts val="1000"/>
               </a:spcAft>
+              <a:buSzPct val="100000"/>
               <a:buChar char="•"/>
               <a:lnSpc>
                 <a:spcPts val="2200"/>
@@ -13976,10 +14088,12 @@
             </a:r>
           </a:p>
           <a:p>
-            <a:pPr>
+            <a:pPr lvl="0" marL="457200" indent="-228600">
+              <a:buFont typeface="Calibri"/>
               <a:spcAft>
                 <a:spcPts val="1000"/>
               </a:spcAft>
+              <a:buSzPct val="100000"/>
               <a:buChar char="•"/>
               <a:lnSpc>
                 <a:spcPts val="2200"/>
@@ -13996,10 +14110,12 @@
             </a:r>
           </a:p>
           <a:p>
-            <a:pPr>
+            <a:pPr lvl="0" marL="457200" indent="-228600">
+              <a:buFont typeface="Calibri"/>
               <a:spcAft>
                 <a:spcPts val="1000"/>
               </a:spcAft>
+              <a:buSzPct val="100000"/>
               <a:buChar char="•"/>
               <a:lnSpc>
                 <a:spcPts val="2200"/>
@@ -14016,10 +14132,12 @@
             </a:r>
           </a:p>
           <a:p>
-            <a:pPr>
+            <a:pPr lvl="0" marL="457200" indent="-228600">
+              <a:buFont typeface="Calibri"/>
               <a:spcAft>
                 <a:spcPts val="1000"/>
               </a:spcAft>
+              <a:buSzPct val="100000"/>
               <a:buChar char="•"/>
               <a:lnSpc>
                 <a:spcPts val="2200"/>
@@ -14036,10 +14154,12 @@
             </a:r>
           </a:p>
           <a:p>
-            <a:pPr>
+            <a:pPr lvl="0" marL="457200" indent="-228600">
+              <a:buFont typeface="Calibri"/>
               <a:spcAft>
                 <a:spcPts val="1000"/>
               </a:spcAft>
+              <a:buSzPct val="100000"/>
               <a:buChar char="•"/>
               <a:lnSpc>
                 <a:spcPts val="2200"/>
@@ -14175,10 +14295,12 @@
           </a:bodyPr>
           <a:lstStyle/>
           <a:p>
-            <a:pPr>
+            <a:pPr lvl="0" marL="457200" indent="-228600">
+              <a:buFont typeface="Calibri"/>
               <a:spcAft>
                 <a:spcPts val="1000"/>
               </a:spcAft>
+              <a:buSzPct val="100000"/>
               <a:buChar char="•"/>
               <a:lnSpc>
                 <a:spcPts val="2200"/>
@@ -14195,10 +14317,12 @@
             </a:r>
           </a:p>
           <a:p>
-            <a:pPr>
+            <a:pPr lvl="0" marL="457200" indent="-228600">
+              <a:buFont typeface="Calibri"/>
               <a:spcAft>
                 <a:spcPts val="1000"/>
               </a:spcAft>
+              <a:buSzPct val="100000"/>
               <a:buChar char="•"/>
               <a:lnSpc>
                 <a:spcPts val="2200"/>
@@ -14215,10 +14339,12 @@
             </a:r>
           </a:p>
           <a:p>
-            <a:pPr>
+            <a:pPr lvl="0" marL="457200" indent="-228600">
+              <a:buFont typeface="Calibri"/>
               <a:spcAft>
                 <a:spcPts val="1000"/>
               </a:spcAft>
+              <a:buSzPct val="100000"/>
               <a:buChar char="•"/>
               <a:lnSpc>
                 <a:spcPts val="2200"/>
@@ -14354,10 +14480,12 @@
           </a:bodyPr>
           <a:lstStyle/>
           <a:p>
-            <a:pPr>
+            <a:pPr lvl="0" marL="457200" indent="-228600">
+              <a:buFont typeface="Calibri"/>
               <a:spcAft>
                 <a:spcPts val="1000"/>
               </a:spcAft>
+              <a:buSzPct val="100000"/>
               <a:buChar char="•"/>
               <a:lnSpc>
                 <a:spcPts val="2200"/>
@@ -14374,10 +14502,12 @@
             </a:r>
           </a:p>
           <a:p>
-            <a:pPr>
+            <a:pPr lvl="0" marL="457200" indent="-228600">
+              <a:buFont typeface="Calibri"/>
               <a:spcAft>
                 <a:spcPts val="1000"/>
               </a:spcAft>
+              <a:buSzPct val="100000"/>
               <a:buChar char="•"/>
               <a:lnSpc>
                 <a:spcPts val="2200"/>
@@ -14394,10 +14524,12 @@
             </a:r>
           </a:p>
           <a:p>
-            <a:pPr>
+            <a:pPr lvl="0" marL="457200" indent="-228600">
+              <a:buFont typeface="Calibri"/>
               <a:spcAft>
                 <a:spcPts val="1000"/>
               </a:spcAft>
+              <a:buSzPct val="100000"/>
               <a:buChar char="•"/>
               <a:lnSpc>
                 <a:spcPts val="2200"/>
@@ -14414,10 +14546,12 @@
             </a:r>
           </a:p>
           <a:p>
-            <a:pPr>
+            <a:pPr lvl="0" marL="457200" indent="-228600">
+              <a:buFont typeface="Calibri"/>
               <a:spcAft>
                 <a:spcPts val="1000"/>
               </a:spcAft>
+              <a:buSzPct val="100000"/>
               <a:buChar char="•"/>
               <a:lnSpc>
                 <a:spcPts val="2200"/>
@@ -14553,10 +14687,12 @@
           </a:bodyPr>
           <a:lstStyle/>
           <a:p>
-            <a:pPr>
+            <a:pPr lvl="0" marL="457200" indent="-228600">
+              <a:buFont typeface="Calibri"/>
               <a:spcAft>
                 <a:spcPts val="1000"/>
               </a:spcAft>
+              <a:buSzPct val="100000"/>
               <a:buChar char="•"/>
               <a:lnSpc>
                 <a:spcPts val="2200"/>
@@ -14573,10 +14709,12 @@
             </a:r>
           </a:p>
           <a:p>
-            <a:pPr>
+            <a:pPr lvl="0" marL="457200" indent="-228600">
+              <a:buFont typeface="Calibri"/>
               <a:spcAft>
                 <a:spcPts val="1000"/>
               </a:spcAft>
+              <a:buSzPct val="100000"/>
               <a:buChar char="•"/>
               <a:lnSpc>
                 <a:spcPts val="2200"/>
@@ -14712,10 +14850,12 @@
           </a:bodyPr>
           <a:lstStyle/>
           <a:p>
-            <a:pPr>
+            <a:pPr lvl="0" marL="457200" indent="-228600">
+              <a:buFont typeface="Calibri"/>
               <a:spcAft>
                 <a:spcPts val="1000"/>
               </a:spcAft>
+              <a:buSzPct val="100000"/>
               <a:buChar char="•"/>
               <a:lnSpc>
                 <a:spcPts val="2200"/>
@@ -14851,10 +14991,12 @@
           </a:bodyPr>
           <a:lstStyle/>
           <a:p>
-            <a:pPr>
+            <a:pPr lvl="0" marL="457200" indent="-228600">
+              <a:buFont typeface="Calibri"/>
               <a:spcAft>
                 <a:spcPts val="1000"/>
               </a:spcAft>
+              <a:buSzPct val="100000"/>
               <a:buChar char="•"/>
               <a:lnSpc>
                 <a:spcPts val="2200"/>
@@ -14871,10 +15013,12 @@
             </a:r>
           </a:p>
           <a:p>
-            <a:pPr>
+            <a:pPr lvl="0" marL="457200" indent="-228600">
+              <a:buFont typeface="Calibri"/>
               <a:spcAft>
                 <a:spcPts val="1000"/>
               </a:spcAft>
+              <a:buSzPct val="100000"/>
               <a:buChar char="•"/>
               <a:lnSpc>
                 <a:spcPts val="2200"/>
@@ -15010,10 +15154,12 @@
           </a:bodyPr>
           <a:lstStyle/>
           <a:p>
-            <a:pPr>
+            <a:pPr lvl="0" marL="457200" indent="-228600">
+              <a:buFont typeface="Calibri"/>
               <a:spcAft>
                 <a:spcPts val="1000"/>
               </a:spcAft>
+              <a:buSzPct val="100000"/>
               <a:buChar char="•"/>
               <a:lnSpc>
                 <a:spcPts val="2200"/>
@@ -15030,10 +15176,12 @@
             </a:r>
           </a:p>
           <a:p>
-            <a:pPr>
+            <a:pPr lvl="0" marL="457200" indent="-228600">
+              <a:buFont typeface="Calibri"/>
               <a:spcAft>
                 <a:spcPts val="1000"/>
               </a:spcAft>
+              <a:buSzPct val="100000"/>
               <a:buChar char="•"/>
               <a:lnSpc>
                 <a:spcPts val="2200"/>
@@ -15050,10 +15198,12 @@
             </a:r>
           </a:p>
           <a:p>
-            <a:pPr>
+            <a:pPr lvl="0" marL="457200" indent="-228600">
+              <a:buFont typeface="Calibri"/>
               <a:spcAft>
                 <a:spcPts val="1000"/>
               </a:spcAft>
+              <a:buSzPct val="100000"/>
               <a:buChar char="•"/>
               <a:lnSpc>
                 <a:spcPts val="2200"/>
@@ -15070,10 +15220,12 @@
             </a:r>
           </a:p>
           <a:p>
-            <a:pPr>
+            <a:pPr lvl="0" marL="457200" indent="-228600">
+              <a:buFont typeface="Calibri"/>
               <a:spcAft>
                 <a:spcPts val="1000"/>
               </a:spcAft>
+              <a:buSzPct val="100000"/>
               <a:buChar char="•"/>
               <a:lnSpc>
                 <a:spcPts val="2200"/>
@@ -15090,10 +15242,12 @@
             </a:r>
           </a:p>
           <a:p>
-            <a:pPr>
+            <a:pPr lvl="0" marL="457200" indent="-228600">
+              <a:buFont typeface="Calibri"/>
               <a:spcAft>
                 <a:spcPts val="1000"/>
               </a:spcAft>
+              <a:buSzPct val="100000"/>
               <a:buChar char="•"/>
               <a:lnSpc>
                 <a:spcPts val="2200"/>
@@ -15110,10 +15264,12 @@
             </a:r>
           </a:p>
           <a:p>
-            <a:pPr>
+            <a:pPr lvl="0" marL="457200" indent="-228600">
+              <a:buFont typeface="Calibri"/>
               <a:spcAft>
                 <a:spcPts val="1000"/>
               </a:spcAft>
+              <a:buSzPct val="100000"/>
               <a:buChar char="•"/>
               <a:lnSpc>
                 <a:spcPts val="2200"/>
@@ -15249,10 +15405,12 @@
           </a:bodyPr>
           <a:lstStyle/>
           <a:p>
-            <a:pPr>
+            <a:pPr lvl="0" marL="457200" indent="-228600">
+              <a:buFont typeface="Calibri"/>
               <a:spcAft>
                 <a:spcPts val="1000"/>
               </a:spcAft>
+              <a:buSzPct val="100000"/>
               <a:buChar char="•"/>
               <a:lnSpc>
                 <a:spcPts val="2200"/>
@@ -15269,10 +15427,12 @@
             </a:r>
           </a:p>
           <a:p>
-            <a:pPr>
+            <a:pPr lvl="0" marL="457200" indent="-228600">
+              <a:buFont typeface="Calibri"/>
               <a:spcAft>
                 <a:spcPts val="1000"/>
               </a:spcAft>
+              <a:buSzPct val="100000"/>
               <a:buChar char="•"/>
               <a:lnSpc>
                 <a:spcPts val="2200"/>
@@ -15289,10 +15449,12 @@
             </a:r>
           </a:p>
           <a:p>
-            <a:pPr>
+            <a:pPr lvl="0" marL="457200" indent="-228600">
+              <a:buFont typeface="Calibri"/>
               <a:spcAft>
                 <a:spcPts val="1000"/>
               </a:spcAft>
+              <a:buSzPct val="100000"/>
               <a:buChar char="•"/>
               <a:lnSpc>
                 <a:spcPts val="2200"/>
@@ -15428,10 +15590,12 @@
           </a:bodyPr>
           <a:lstStyle/>
           <a:p>
-            <a:pPr>
+            <a:pPr lvl="0" marL="457200" indent="-228600">
+              <a:buFont typeface="Calibri"/>
               <a:spcAft>
                 <a:spcPts val="1000"/>
               </a:spcAft>
+              <a:buSzPct val="100000"/>
               <a:buChar char="•"/>
               <a:lnSpc>
                 <a:spcPts val="2200"/>
@@ -15448,10 +15612,12 @@
             </a:r>
           </a:p>
           <a:p>
-            <a:pPr>
+            <a:pPr lvl="0" marL="457200" indent="-228600">
+              <a:buFont typeface="Calibri"/>
               <a:spcAft>
                 <a:spcPts val="1000"/>
               </a:spcAft>
+              <a:buSzPct val="100000"/>
               <a:buChar char="•"/>
               <a:lnSpc>
                 <a:spcPts val="2200"/>
@@ -15468,10 +15634,12 @@
             </a:r>
           </a:p>
           <a:p>
-            <a:pPr>
+            <a:pPr lvl="0" marL="457200" indent="-228600">
+              <a:buFont typeface="Calibri"/>
               <a:spcAft>
                 <a:spcPts val="1000"/>
               </a:spcAft>
+              <a:buSzPct val="100000"/>
               <a:buChar char="•"/>
               <a:lnSpc>
                 <a:spcPts val="2200"/>
@@ -15488,10 +15656,12 @@
             </a:r>
           </a:p>
           <a:p>
-            <a:pPr>
+            <a:pPr lvl="0" marL="457200" indent="-228600">
+              <a:buFont typeface="Calibri"/>
               <a:spcAft>
                 <a:spcPts val="1000"/>
               </a:spcAft>
+              <a:buSzPct val="100000"/>
               <a:buChar char="•"/>
               <a:lnSpc>
                 <a:spcPts val="2200"/>
@@ -15627,10 +15797,12 @@
           </a:bodyPr>
           <a:lstStyle/>
           <a:p>
-            <a:pPr>
+            <a:pPr lvl="0" marL="457200" indent="-228600">
+              <a:buFont typeface="Calibri"/>
               <a:spcAft>
                 <a:spcPts val="1000"/>
               </a:spcAft>
+              <a:buSzPct val="100000"/>
               <a:buChar char="•"/>
               <a:lnSpc>
                 <a:spcPts val="2200"/>
@@ -15647,10 +15819,12 @@
             </a:r>
           </a:p>
           <a:p>
-            <a:pPr>
+            <a:pPr lvl="0" marL="457200" indent="-228600">
+              <a:buFont typeface="Calibri"/>
               <a:spcAft>
                 <a:spcPts val="1000"/>
               </a:spcAft>
+              <a:buSzPct val="100000"/>
               <a:buChar char="•"/>
               <a:lnSpc>
                 <a:spcPts val="2200"/>
@@ -15786,10 +15960,12 @@
           </a:bodyPr>
           <a:lstStyle/>
           <a:p>
-            <a:pPr>
+            <a:pPr lvl="0" marL="457200" indent="-228600">
+              <a:buFont typeface="Calibri"/>
               <a:spcAft>
                 <a:spcPts val="1000"/>
               </a:spcAft>
+              <a:buSzPct val="100000"/>
               <a:buChar char="•"/>
               <a:lnSpc>
                 <a:spcPts val="2200"/>
@@ -15806,10 +15982,12 @@
             </a:r>
           </a:p>
           <a:p>
-            <a:pPr>
+            <a:pPr lvl="0" marL="457200" indent="-228600">
+              <a:buFont typeface="Calibri"/>
               <a:spcAft>
                 <a:spcPts val="1000"/>
               </a:spcAft>
+              <a:buSzPct val="100000"/>
               <a:buChar char="•"/>
               <a:lnSpc>
                 <a:spcPts val="2200"/>
@@ -15826,10 +16004,12 @@
             </a:r>
           </a:p>
           <a:p>
-            <a:pPr>
+            <a:pPr lvl="0" marL="457200" indent="-228600">
+              <a:buFont typeface="Calibri"/>
               <a:spcAft>
                 <a:spcPts val="1000"/>
               </a:spcAft>
+              <a:buSzPct val="100000"/>
               <a:buChar char="•"/>
               <a:lnSpc>
                 <a:spcPts val="2200"/>
@@ -15846,10 +16026,12 @@
             </a:r>
           </a:p>
           <a:p>
-            <a:pPr>
+            <a:pPr lvl="0" marL="457200" indent="-228600">
+              <a:buFont typeface="Calibri"/>
               <a:spcAft>
                 <a:spcPts val="1000"/>
               </a:spcAft>
+              <a:buSzPct val="100000"/>
               <a:buChar char="•"/>
               <a:lnSpc>
                 <a:spcPts val="2200"/>
@@ -15985,10 +16167,12 @@
           </a:bodyPr>
           <a:lstStyle/>
           <a:p>
-            <a:pPr>
+            <a:pPr lvl="0" marL="457200" indent="-228600">
+              <a:buFont typeface="Calibri"/>
               <a:spcAft>
                 <a:spcPts val="1000"/>
               </a:spcAft>
+              <a:buSzPct val="100000"/>
               <a:buChar char="•"/>
               <a:lnSpc>
                 <a:spcPts val="2200"/>
@@ -16005,10 +16189,12 @@
             </a:r>
           </a:p>
           <a:p>
-            <a:pPr>
+            <a:pPr lvl="0" marL="457200" indent="-228600">
+              <a:buFont typeface="Calibri"/>
               <a:spcAft>
                 <a:spcPts val="1000"/>
               </a:spcAft>
+              <a:buSzPct val="100000"/>
               <a:buChar char="•"/>
               <a:lnSpc>
                 <a:spcPts val="2200"/>
@@ -16144,10 +16330,12 @@
           </a:bodyPr>
           <a:lstStyle/>
           <a:p>
-            <a:pPr>
+            <a:pPr lvl="0" marL="457200" indent="-228600">
+              <a:buFont typeface="Calibri"/>
               <a:spcAft>
                 <a:spcPts val="1000"/>
               </a:spcAft>
+              <a:buSzPct val="100000"/>
               <a:buChar char="•"/>
               <a:lnSpc>
                 <a:spcPts val="2200"/>
@@ -16164,10 +16352,12 @@
             </a:r>
           </a:p>
           <a:p>
-            <a:pPr>
+            <a:pPr lvl="0" marL="457200" indent="-228600">
+              <a:buFont typeface="Calibri"/>
               <a:spcAft>
                 <a:spcPts val="1000"/>
               </a:spcAft>
+              <a:buSzPct val="100000"/>
               <a:buChar char="•"/>
               <a:lnSpc>
                 <a:spcPts val="2200"/>
@@ -16184,10 +16374,12 @@
             </a:r>
           </a:p>
           <a:p>
-            <a:pPr>
+            <a:pPr lvl="0" marL="457200" indent="-228600">
+              <a:buFont typeface="Calibri"/>
               <a:spcAft>
                 <a:spcPts val="1000"/>
               </a:spcAft>
+              <a:buSzPct val="100000"/>
               <a:buChar char="•"/>
               <a:lnSpc>
                 <a:spcPts val="2200"/>
@@ -16204,10 +16396,12 @@
             </a:r>
           </a:p>
           <a:p>
-            <a:pPr>
+            <a:pPr lvl="0" marL="457200" indent="-228600">
+              <a:buFont typeface="Calibri"/>
               <a:spcAft>
                 <a:spcPts val="1000"/>
               </a:spcAft>
+              <a:buSzPct val="100000"/>
               <a:buChar char="•"/>
               <a:lnSpc>
                 <a:spcPts val="2200"/>
@@ -16343,10 +16537,12 @@
           </a:bodyPr>
           <a:lstStyle/>
           <a:p>
-            <a:pPr>
+            <a:pPr lvl="0" marL="457200" indent="-228600">
+              <a:buFont typeface="Calibri"/>
               <a:spcAft>
                 <a:spcPts val="1000"/>
               </a:spcAft>
+              <a:buSzPct val="100000"/>
               <a:buChar char="•"/>
               <a:lnSpc>
                 <a:spcPts val="2200"/>
@@ -16363,10 +16559,12 @@
             </a:r>
           </a:p>
           <a:p>
-            <a:pPr>
+            <a:pPr lvl="0" marL="457200" indent="-228600">
+              <a:buFont typeface="Calibri"/>
               <a:spcAft>
                 <a:spcPts val="1000"/>
               </a:spcAft>
+              <a:buSzPct val="100000"/>
               <a:buChar char="•"/>
               <a:lnSpc>
                 <a:spcPts val="2200"/>
@@ -16383,10 +16581,12 @@
             </a:r>
           </a:p>
           <a:p>
-            <a:pPr>
+            <a:pPr lvl="0" marL="457200" indent="-228600">
+              <a:buFont typeface="Calibri"/>
               <a:spcAft>
                 <a:spcPts val="1000"/>
               </a:spcAft>
+              <a:buSzPct val="100000"/>
               <a:buChar char="•"/>
               <a:lnSpc>
                 <a:spcPts val="2200"/>
@@ -16522,10 +16722,12 @@
           </a:bodyPr>
           <a:lstStyle/>
           <a:p>
-            <a:pPr>
+            <a:pPr lvl="0" marL="457200" indent="-228600">
+              <a:buFont typeface="Calibri"/>
               <a:spcAft>
                 <a:spcPts val="1000"/>
               </a:spcAft>
+              <a:buSzPct val="100000"/>
               <a:buChar char="•"/>
               <a:lnSpc>
                 <a:spcPts val="2200"/>
@@ -16542,10 +16744,12 @@
             </a:r>
           </a:p>
           <a:p>
-            <a:pPr>
+            <a:pPr lvl="0" marL="457200" indent="-228600">
+              <a:buFont typeface="Calibri"/>
               <a:spcAft>
                 <a:spcPts val="1000"/>
               </a:spcAft>
+              <a:buSzPct val="100000"/>
               <a:buChar char="•"/>
               <a:lnSpc>
                 <a:spcPts val="2200"/>
@@ -16681,10 +16885,12 @@
           </a:bodyPr>
           <a:lstStyle/>
           <a:p>
-            <a:pPr>
+            <a:pPr lvl="0" marL="457200" indent="-228600">
+              <a:buFont typeface="Calibri"/>
               <a:spcAft>
                 <a:spcPts val="1000"/>
               </a:spcAft>
+              <a:buSzPct val="100000"/>
               <a:buChar char="•"/>
               <a:lnSpc>
                 <a:spcPts val="2200"/>
@@ -16820,10 +17026,12 @@
           </a:bodyPr>
           <a:lstStyle/>
           <a:p>
-            <a:pPr>
+            <a:pPr lvl="0" marL="457200" indent="-228600">
+              <a:buFont typeface="Calibri"/>
               <a:spcAft>
                 <a:spcPts val="1000"/>
               </a:spcAft>
+              <a:buSzPct val="100000"/>
               <a:buChar char="•"/>
               <a:lnSpc>
                 <a:spcPts val="2200"/>
@@ -16840,10 +17048,12 @@
             </a:r>
           </a:p>
           <a:p>
-            <a:pPr>
+            <a:pPr lvl="0" marL="457200" indent="-228600">
+              <a:buFont typeface="Calibri"/>
               <a:spcAft>
                 <a:spcPts val="1000"/>
               </a:spcAft>
+              <a:buSzPct val="100000"/>
               <a:buChar char="•"/>
               <a:lnSpc>
                 <a:spcPts val="2200"/>
@@ -16979,10 +17189,12 @@
           </a:bodyPr>
           <a:lstStyle/>
           <a:p>
-            <a:pPr>
+            <a:pPr lvl="0" marL="457200" indent="-228600">
+              <a:buFont typeface="Calibri"/>
               <a:spcAft>
                 <a:spcPts val="1000"/>
               </a:spcAft>
+              <a:buSzPct val="100000"/>
               <a:buChar char="•"/>
               <a:lnSpc>
                 <a:spcPts val="2200"/>
@@ -16999,10 +17211,12 @@
             </a:r>
           </a:p>
           <a:p>
-            <a:pPr>
+            <a:pPr lvl="0" marL="457200" indent="-228600">
+              <a:buFont typeface="Calibri"/>
               <a:spcAft>
                 <a:spcPts val="1000"/>
               </a:spcAft>
+              <a:buSzPct val="100000"/>
               <a:buChar char="•"/>
               <a:lnSpc>
                 <a:spcPts val="2200"/>
@@ -17019,10 +17233,12 @@
             </a:r>
           </a:p>
           <a:p>
-            <a:pPr>
+            <a:pPr lvl="0" marL="457200" indent="-228600">
+              <a:buFont typeface="Calibri"/>
               <a:spcAft>
                 <a:spcPts val="1000"/>
               </a:spcAft>
+              <a:buSzPct val="100000"/>
               <a:buChar char="•"/>
               <a:lnSpc>
                 <a:spcPts val="2200"/>
@@ -17158,10 +17374,12 @@
           </a:bodyPr>
           <a:lstStyle/>
           <a:p>
-            <a:pPr>
+            <a:pPr lvl="0" marL="457200" indent="-228600">
+              <a:buFont typeface="Calibri"/>
               <a:spcAft>
                 <a:spcPts val="1000"/>
               </a:spcAft>
+              <a:buSzPct val="100000"/>
               <a:buChar char="•"/>
               <a:lnSpc>
                 <a:spcPts val="2200"/>
@@ -17178,10 +17396,12 @@
             </a:r>
           </a:p>
           <a:p>
-            <a:pPr>
+            <a:pPr lvl="0" marL="457200" indent="-228600">
+              <a:buFont typeface="Calibri"/>
               <a:spcAft>
                 <a:spcPts val="1000"/>
               </a:spcAft>
+              <a:buSzPct val="100000"/>
               <a:buChar char="•"/>
               <a:lnSpc>
                 <a:spcPts val="2200"/>
@@ -17198,10 +17418,12 @@
             </a:r>
           </a:p>
           <a:p>
-            <a:pPr>
+            <a:pPr lvl="0" marL="457200" indent="-228600">
+              <a:buFont typeface="Calibri"/>
               <a:spcAft>
                 <a:spcPts val="1000"/>
               </a:spcAft>
+              <a:buSzPct val="100000"/>
               <a:buChar char="•"/>
               <a:lnSpc>
                 <a:spcPts val="2200"/>
@@ -17337,10 +17559,12 @@
           </a:bodyPr>
           <a:lstStyle/>
           <a:p>
-            <a:pPr>
+            <a:pPr lvl="0" marL="457200" indent="-228600">
+              <a:buFont typeface="Calibri"/>
               <a:spcAft>
                 <a:spcPts val="1000"/>
               </a:spcAft>
+              <a:buSzPct val="100000"/>
               <a:buChar char="•"/>
               <a:lnSpc>
                 <a:spcPts val="2200"/>
@@ -17357,10 +17581,12 @@
             </a:r>
           </a:p>
           <a:p>
-            <a:pPr>
+            <a:pPr lvl="0" marL="457200" indent="-228600">
+              <a:buFont typeface="Calibri"/>
               <a:spcAft>
                 <a:spcPts val="1000"/>
               </a:spcAft>
+              <a:buSzPct val="100000"/>
               <a:buChar char="•"/>
               <a:lnSpc>
                 <a:spcPts val="2200"/>
@@ -17377,10 +17603,12 @@
             </a:r>
           </a:p>
           <a:p>
-            <a:pPr>
+            <a:pPr lvl="0" marL="457200" indent="-228600">
+              <a:buFont typeface="Calibri"/>
               <a:spcAft>
                 <a:spcPts val="1000"/>
               </a:spcAft>
+              <a:buSzPct val="100000"/>
               <a:buChar char="•"/>
               <a:lnSpc>
                 <a:spcPts val="2200"/>
@@ -17397,10 +17625,12 @@
             </a:r>
           </a:p>
           <a:p>
-            <a:pPr>
+            <a:pPr lvl="0" marL="457200" indent="-228600">
+              <a:buFont typeface="Calibri"/>
               <a:spcAft>
                 <a:spcPts val="1000"/>
               </a:spcAft>
+              <a:buSzPct val="100000"/>
               <a:buChar char="•"/>
               <a:lnSpc>
                 <a:spcPts val="2200"/>
@@ -17417,10 +17647,12 @@
             </a:r>
           </a:p>
           <a:p>
-            <a:pPr>
+            <a:pPr lvl="0" marL="457200" indent="-228600">
+              <a:buFont typeface="Calibri"/>
               <a:spcAft>
                 <a:spcPts val="1000"/>
               </a:spcAft>
+              <a:buSzPct val="100000"/>
               <a:buChar char="•"/>
               <a:lnSpc>
                 <a:spcPts val="2200"/>
@@ -17556,10 +17788,12 @@
           </a:bodyPr>
           <a:lstStyle/>
           <a:p>
-            <a:pPr>
+            <a:pPr lvl="0" marL="457200" indent="-228600">
+              <a:buFont typeface="Calibri"/>
               <a:spcAft>
                 <a:spcPts val="1000"/>
               </a:spcAft>
+              <a:buSzPct val="100000"/>
               <a:buChar char="•"/>
               <a:lnSpc>
                 <a:spcPts val="2200"/>
@@ -17576,10 +17810,12 @@
             </a:r>
           </a:p>
           <a:p>
-            <a:pPr>
+            <a:pPr lvl="0" marL="457200" indent="-228600">
+              <a:buFont typeface="Calibri"/>
               <a:spcAft>
                 <a:spcPts val="1000"/>
               </a:spcAft>
+              <a:buSzPct val="100000"/>
               <a:buChar char="•"/>
               <a:lnSpc>
                 <a:spcPts val="2200"/>
@@ -17596,10 +17832,12 @@
             </a:r>
           </a:p>
           <a:p>
-            <a:pPr>
+            <a:pPr lvl="0" marL="457200" indent="-228600">
+              <a:buFont typeface="Calibri"/>
               <a:spcAft>
                 <a:spcPts val="1000"/>
               </a:spcAft>
+              <a:buSzPct val="100000"/>
               <a:buChar char="•"/>
               <a:lnSpc>
                 <a:spcPts val="2200"/>
@@ -17735,10 +17973,12 @@
           </a:bodyPr>
           <a:lstStyle/>
           <a:p>
-            <a:pPr>
+            <a:pPr lvl="0" marL="457200" indent="-228600">
+              <a:buFont typeface="Calibri"/>
               <a:spcAft>
                 <a:spcPts val="1000"/>
               </a:spcAft>
+              <a:buSzPct val="100000"/>
               <a:buChar char="•"/>
               <a:lnSpc>
                 <a:spcPts val="2200"/>
@@ -17755,10 +17995,12 @@
             </a:r>
           </a:p>
           <a:p>
-            <a:pPr>
+            <a:pPr lvl="0" marL="457200" indent="-228600">
+              <a:buFont typeface="Calibri"/>
               <a:spcAft>
                 <a:spcPts val="1000"/>
               </a:spcAft>
+              <a:buSzPct val="100000"/>
               <a:buChar char="•"/>
               <a:lnSpc>
                 <a:spcPts val="2200"/>
@@ -17775,10 +18017,12 @@
             </a:r>
           </a:p>
           <a:p>
-            <a:pPr>
+            <a:pPr lvl="0" marL="457200" indent="-228600">
+              <a:buFont typeface="Calibri"/>
               <a:spcAft>
                 <a:spcPts val="1000"/>
               </a:spcAft>
+              <a:buSzPct val="100000"/>
               <a:buChar char="•"/>
               <a:lnSpc>
                 <a:spcPts val="2200"/>
@@ -17795,10 +18039,12 @@
             </a:r>
           </a:p>
           <a:p>
-            <a:pPr>
+            <a:pPr lvl="0" marL="457200" indent="-228600">
+              <a:buFont typeface="Calibri"/>
               <a:spcAft>
                 <a:spcPts val="1000"/>
               </a:spcAft>
+              <a:buSzPct val="100000"/>
               <a:buChar char="•"/>
               <a:lnSpc>
                 <a:spcPts val="2200"/>
@@ -17815,10 +18061,12 @@
             </a:r>
           </a:p>
           <a:p>
-            <a:pPr>
+            <a:pPr lvl="0" marL="457200" indent="-228600">
+              <a:buFont typeface="Calibri"/>
               <a:spcAft>
                 <a:spcPts val="1000"/>
               </a:spcAft>
+              <a:buSzPct val="100000"/>
               <a:buChar char="•"/>
               <a:lnSpc>
                 <a:spcPts val="2200"/>
@@ -17954,10 +18202,12 @@
           </a:bodyPr>
           <a:lstStyle/>
           <a:p>
-            <a:pPr>
+            <a:pPr lvl="0" marL="457200" indent="-228600">
+              <a:buFont typeface="Calibri"/>
               <a:spcAft>
                 <a:spcPts val="1000"/>
               </a:spcAft>
+              <a:buSzPct val="100000"/>
               <a:buChar char="•"/>
               <a:lnSpc>
                 <a:spcPts val="2200"/>
@@ -17974,10 +18224,12 @@
             </a:r>
           </a:p>
           <a:p>
-            <a:pPr>
+            <a:pPr lvl="0" marL="457200" indent="-228600">
+              <a:buFont typeface="Calibri"/>
               <a:spcAft>
                 <a:spcPts val="1000"/>
               </a:spcAft>
+              <a:buSzPct val="100000"/>
               <a:buChar char="•"/>
               <a:lnSpc>
                 <a:spcPts val="2200"/>
@@ -17994,10 +18246,12 @@
             </a:r>
           </a:p>
           <a:p>
-            <a:pPr>
+            <a:pPr lvl="0" marL="457200" indent="-228600">
+              <a:buFont typeface="Calibri"/>
               <a:spcAft>
                 <a:spcPts val="1000"/>
               </a:spcAft>
+              <a:buSzPct val="100000"/>
               <a:buChar char="•"/>
               <a:lnSpc>
                 <a:spcPts val="2200"/>
@@ -18133,10 +18387,12 @@
           </a:bodyPr>
           <a:lstStyle/>
           <a:p>
-            <a:pPr>
+            <a:pPr lvl="0" marL="457200" indent="-228600">
+              <a:buFont typeface="Calibri"/>
               <a:spcAft>
                 <a:spcPts val="1000"/>
               </a:spcAft>
+              <a:buSzPct val="100000"/>
               <a:buChar char="•"/>
               <a:lnSpc>
                 <a:spcPts val="2200"/>
@@ -18153,10 +18409,12 @@
             </a:r>
           </a:p>
           <a:p>
-            <a:pPr>
+            <a:pPr lvl="0" marL="457200" indent="-228600">
+              <a:buFont typeface="Calibri"/>
               <a:spcAft>
                 <a:spcPts val="1000"/>
               </a:spcAft>
+              <a:buSzPct val="100000"/>
               <a:buChar char="•"/>
               <a:lnSpc>
                 <a:spcPts val="2200"/>
@@ -18292,10 +18550,12 @@
           </a:bodyPr>
           <a:lstStyle/>
           <a:p>
-            <a:pPr>
+            <a:pPr lvl="0" marL="457200" indent="-228600">
+              <a:buFont typeface="Calibri"/>
               <a:spcAft>
                 <a:spcPts val="1000"/>
               </a:spcAft>
+              <a:buSzPct val="100000"/>
               <a:buChar char="•"/>
               <a:lnSpc>
                 <a:spcPts val="2200"/>
@@ -18312,10 +18572,12 @@
             </a:r>
           </a:p>
           <a:p>
-            <a:pPr>
+            <a:pPr lvl="0" marL="457200" indent="-228600">
+              <a:buFont typeface="Calibri"/>
               <a:spcAft>
                 <a:spcPts val="1000"/>
               </a:spcAft>
+              <a:buSzPct val="100000"/>
               <a:buChar char="•"/>
               <a:lnSpc>
                 <a:spcPts val="2200"/>
@@ -18332,10 +18594,12 @@
             </a:r>
           </a:p>
           <a:p>
-            <a:pPr>
+            <a:pPr lvl="0" marL="457200" indent="-228600">
+              <a:buFont typeface="Calibri"/>
               <a:spcAft>
                 <a:spcPts val="1000"/>
               </a:spcAft>
+              <a:buSzPct val="100000"/>
               <a:buChar char="•"/>
               <a:lnSpc>
                 <a:spcPts val="2200"/>
@@ -18352,10 +18616,12 @@
             </a:r>
           </a:p>
           <a:p>
-            <a:pPr>
+            <a:pPr lvl="0" marL="457200" indent="-228600">
+              <a:buFont typeface="Calibri"/>
               <a:spcAft>
                 <a:spcPts val="1000"/>
               </a:spcAft>
+              <a:buSzPct val="100000"/>
               <a:buChar char="•"/>
               <a:lnSpc>
                 <a:spcPts val="2200"/>
@@ -18372,10 +18638,12 @@
             </a:r>
           </a:p>
           <a:p>
-            <a:pPr>
+            <a:pPr lvl="0" marL="457200" indent="-228600">
+              <a:buFont typeface="Calibri"/>
               <a:spcAft>
                 <a:spcPts val="1000"/>
               </a:spcAft>
+              <a:buSzPct val="100000"/>
               <a:buChar char="•"/>
               <a:lnSpc>
                 <a:spcPts val="2200"/>
@@ -18392,10 +18660,12 @@
             </a:r>
           </a:p>
           <a:p>
-            <a:pPr>
+            <a:pPr lvl="0" marL="457200" indent="-228600">
+              <a:buFont typeface="Calibri"/>
               <a:spcAft>
                 <a:spcPts val="1000"/>
               </a:spcAft>
+              <a:buSzPct val="100000"/>
               <a:buChar char="•"/>
               <a:lnSpc>
                 <a:spcPts val="2200"/>
@@ -18531,10 +18801,12 @@
           </a:bodyPr>
           <a:lstStyle/>
           <a:p>
-            <a:pPr>
+            <a:pPr lvl="0" marL="457200" indent="-228600">
+              <a:buFont typeface="Calibri"/>
               <a:spcAft>
                 <a:spcPts val="1000"/>
               </a:spcAft>
+              <a:buSzPct val="100000"/>
               <a:buChar char="•"/>
               <a:lnSpc>
                 <a:spcPts val="2200"/>
@@ -18670,10 +18942,12 @@
           </a:bodyPr>
           <a:lstStyle/>
           <a:p>
-            <a:pPr>
+            <a:pPr lvl="0" marL="457200" indent="-228600">
+              <a:buFont typeface="Calibri"/>
               <a:spcAft>
                 <a:spcPts val="1000"/>
               </a:spcAft>
+              <a:buSzPct val="100000"/>
               <a:buChar char="•"/>
               <a:lnSpc>
                 <a:spcPts val="2200"/>
@@ -18690,10 +18964,12 @@
             </a:r>
           </a:p>
           <a:p>
-            <a:pPr>
+            <a:pPr lvl="0" marL="457200" indent="-228600">
+              <a:buFont typeface="Calibri"/>
               <a:spcAft>
                 <a:spcPts val="1000"/>
               </a:spcAft>
+              <a:buSzPct val="100000"/>
               <a:buChar char="•"/>
               <a:lnSpc>
                 <a:spcPts val="2200"/>
@@ -18829,10 +19105,12 @@
           </a:bodyPr>
           <a:lstStyle/>
           <a:p>
-            <a:pPr>
+            <a:pPr lvl="0" marL="457200" indent="-228600">
+              <a:buFont typeface="Calibri"/>
               <a:spcAft>
                 <a:spcPts val="1000"/>
               </a:spcAft>
+              <a:buSzPct val="100000"/>
               <a:buChar char="•"/>
               <a:lnSpc>
                 <a:spcPts val="2200"/>
@@ -18849,10 +19127,12 @@
             </a:r>
           </a:p>
           <a:p>
-            <a:pPr>
+            <a:pPr lvl="0" marL="457200" indent="-228600">
+              <a:buFont typeface="Calibri"/>
               <a:spcAft>
                 <a:spcPts val="1000"/>
               </a:spcAft>
+              <a:buSzPct val="100000"/>
               <a:buChar char="•"/>
               <a:lnSpc>
                 <a:spcPts val="2200"/>
@@ -18869,10 +19149,12 @@
             </a:r>
           </a:p>
           <a:p>
-            <a:pPr>
+            <a:pPr lvl="0" marL="457200" indent="-228600">
+              <a:buFont typeface="Calibri"/>
               <a:spcAft>
                 <a:spcPts val="1000"/>
               </a:spcAft>
+              <a:buSzPct val="100000"/>
               <a:buChar char="•"/>
               <a:lnSpc>
                 <a:spcPts val="2200"/>
@@ -18889,10 +19171,12 @@
             </a:r>
           </a:p>
           <a:p>
-            <a:pPr>
+            <a:pPr lvl="0" marL="457200" indent="-228600">
+              <a:buFont typeface="Calibri"/>
               <a:spcAft>
                 <a:spcPts val="1000"/>
               </a:spcAft>
+              <a:buSzPct val="100000"/>
               <a:buChar char="•"/>
               <a:lnSpc>
                 <a:spcPts val="2200"/>
@@ -18909,10 +19193,12 @@
             </a:r>
           </a:p>
           <a:p>
-            <a:pPr>
+            <a:pPr lvl="0" marL="457200" indent="-228600">
+              <a:buFont typeface="Calibri"/>
               <a:spcAft>
                 <a:spcPts val="1000"/>
               </a:spcAft>
+              <a:buSzPct val="100000"/>
               <a:buChar char="•"/>
               <a:lnSpc>
                 <a:spcPts val="2200"/>
@@ -19048,10 +19334,12 @@
           </a:bodyPr>
           <a:lstStyle/>
           <a:p>
-            <a:pPr>
+            <a:pPr lvl="0" marL="457200" indent="-228600">
+              <a:buFont typeface="Calibri"/>
               <a:spcAft>
                 <a:spcPts val="1000"/>
               </a:spcAft>
+              <a:buSzPct val="100000"/>
               <a:buChar char="•"/>
               <a:lnSpc>
                 <a:spcPts val="2200"/>
@@ -19068,10 +19356,12 @@
             </a:r>
           </a:p>
           <a:p>
-            <a:pPr>
+            <a:pPr lvl="0" marL="457200" indent="-228600">
+              <a:buFont typeface="Calibri"/>
               <a:spcAft>
                 <a:spcPts val="1000"/>
               </a:spcAft>
+              <a:buSzPct val="100000"/>
               <a:buChar char="•"/>
               <a:lnSpc>
                 <a:spcPts val="2200"/>
@@ -19088,10 +19378,12 @@
             </a:r>
           </a:p>
           <a:p>
-            <a:pPr>
+            <a:pPr lvl="0" marL="457200" indent="-228600">
+              <a:buFont typeface="Calibri"/>
               <a:spcAft>
                 <a:spcPts val="1000"/>
               </a:spcAft>
+              <a:buSzPct val="100000"/>
               <a:buChar char="•"/>
               <a:lnSpc>
                 <a:spcPts val="2200"/>
@@ -19108,10 +19400,12 @@
             </a:r>
           </a:p>
           <a:p>
-            <a:pPr>
+            <a:pPr lvl="0" marL="457200" indent="-228600">
+              <a:buFont typeface="Calibri"/>
               <a:spcAft>
                 <a:spcPts val="1000"/>
               </a:spcAft>
+              <a:buSzPct val="100000"/>
               <a:buChar char="•"/>
               <a:lnSpc>
                 <a:spcPts val="2200"/>
@@ -19128,10 +19422,12 @@
             </a:r>
           </a:p>
           <a:p>
-            <a:pPr>
+            <a:pPr lvl="0" marL="457200" indent="-228600">
+              <a:buFont typeface="Calibri"/>
               <a:spcAft>
                 <a:spcPts val="1000"/>
               </a:spcAft>
+              <a:buSzPct val="100000"/>
               <a:buChar char="•"/>
               <a:lnSpc>
                 <a:spcPts val="2200"/>
@@ -19267,10 +19563,12 @@
           </a:bodyPr>
           <a:lstStyle/>
           <a:p>
-            <a:pPr>
+            <a:pPr lvl="0" marL="457200" indent="-228600">
+              <a:buFont typeface="Calibri"/>
               <a:spcAft>
                 <a:spcPts val="1000"/>
               </a:spcAft>
+              <a:buSzPct val="100000"/>
               <a:buChar char="•"/>
               <a:lnSpc>
                 <a:spcPts val="2200"/>
@@ -19287,10 +19585,12 @@
             </a:r>
           </a:p>
           <a:p>
-            <a:pPr>
+            <a:pPr lvl="0" marL="457200" indent="-228600">
+              <a:buFont typeface="Calibri"/>
               <a:spcAft>
                 <a:spcPts val="1000"/>
               </a:spcAft>
+              <a:buSzPct val="100000"/>
               <a:buChar char="•"/>
               <a:lnSpc>
                 <a:spcPts val="2200"/>
@@ -19307,10 +19607,12 @@
             </a:r>
           </a:p>
           <a:p>
-            <a:pPr>
+            <a:pPr lvl="0" marL="457200" indent="-228600">
+              <a:buFont typeface="Calibri"/>
               <a:spcAft>
                 <a:spcPts val="1000"/>
               </a:spcAft>
+              <a:buSzPct val="100000"/>
               <a:buChar char="•"/>
               <a:lnSpc>
                 <a:spcPts val="2200"/>
@@ -19446,10 +19748,12 @@
           </a:bodyPr>
           <a:lstStyle/>
           <a:p>
-            <a:pPr>
+            <a:pPr lvl="0" marL="457200" indent="-228600">
+              <a:buFont typeface="Calibri"/>
               <a:spcAft>
                 <a:spcPts val="1000"/>
               </a:spcAft>
+              <a:buSzPct val="100000"/>
               <a:buChar char="•"/>
               <a:lnSpc>
                 <a:spcPts val="2200"/>
@@ -19466,10 +19770,12 @@
             </a:r>
           </a:p>
           <a:p>
-            <a:pPr>
+            <a:pPr lvl="0" marL="457200" indent="-228600">
+              <a:buFont typeface="Calibri"/>
               <a:spcAft>
                 <a:spcPts val="1000"/>
               </a:spcAft>
+              <a:buSzPct val="100000"/>
               <a:buChar char="•"/>
               <a:lnSpc>
                 <a:spcPts val="2200"/>
@@ -19486,10 +19792,12 @@
             </a:r>
           </a:p>
           <a:p>
-            <a:pPr>
+            <a:pPr lvl="0" marL="457200" indent="-228600">
+              <a:buFont typeface="Calibri"/>
               <a:spcAft>
                 <a:spcPts val="1000"/>
               </a:spcAft>
+              <a:buSzPct val="100000"/>
               <a:buChar char="•"/>
               <a:lnSpc>
                 <a:spcPts val="2200"/>
@@ -19506,10 +19814,12 @@
             </a:r>
           </a:p>
           <a:p>
-            <a:pPr>
+            <a:pPr lvl="0" marL="457200" indent="-228600">
+              <a:buFont typeface="Calibri"/>
               <a:spcAft>
                 <a:spcPts val="1000"/>
               </a:spcAft>
+              <a:buSzPct val="100000"/>
               <a:buChar char="•"/>
               <a:lnSpc>
                 <a:spcPts val="2200"/>
@@ -19526,10 +19836,12 @@
             </a:r>
           </a:p>
           <a:p>
-            <a:pPr>
+            <a:pPr lvl="0" marL="457200" indent="-228600">
+              <a:buFont typeface="Calibri"/>
               <a:spcAft>
                 <a:spcPts val="1000"/>
               </a:spcAft>
+              <a:buSzPct val="100000"/>
               <a:buChar char="•"/>
               <a:lnSpc>
                 <a:spcPts val="2200"/>
@@ -19665,10 +19977,12 @@
           </a:bodyPr>
           <a:lstStyle/>
           <a:p>
-            <a:pPr>
+            <a:pPr lvl="0" marL="457200" indent="-228600">
+              <a:buFont typeface="Calibri"/>
               <a:spcAft>
                 <a:spcPts val="1000"/>
               </a:spcAft>
+              <a:buSzPct val="100000"/>
               <a:buChar char="•"/>
               <a:lnSpc>
                 <a:spcPts val="2200"/>
@@ -19685,10 +19999,12 @@
             </a:r>
           </a:p>
           <a:p>
-            <a:pPr>
+            <a:pPr lvl="0" marL="457200" indent="-228600">
+              <a:buFont typeface="Calibri"/>
               <a:spcAft>
                 <a:spcPts val="1000"/>
               </a:spcAft>
+              <a:buSzPct val="100000"/>
               <a:buChar char="•"/>
               <a:lnSpc>
                 <a:spcPts val="2200"/>
@@ -19824,10 +20140,12 @@
           </a:bodyPr>
           <a:lstStyle/>
           <a:p>
-            <a:pPr>
+            <a:pPr lvl="0" marL="457200" indent="-228600">
+              <a:buFont typeface="Calibri"/>
               <a:spcAft>
                 <a:spcPts val="1000"/>
               </a:spcAft>
+              <a:buSzPct val="100000"/>
               <a:buChar char="•"/>
               <a:lnSpc>
                 <a:spcPts val="2200"/>
@@ -19844,10 +20162,12 @@
             </a:r>
           </a:p>
           <a:p>
-            <a:pPr>
+            <a:pPr lvl="0" marL="457200" indent="-228600">
+              <a:buFont typeface="Calibri"/>
               <a:spcAft>
                 <a:spcPts val="1000"/>
               </a:spcAft>
+              <a:buSzPct val="100000"/>
               <a:buChar char="•"/>
               <a:lnSpc>
                 <a:spcPts val="2200"/>
@@ -19864,10 +20184,12 @@
             </a:r>
           </a:p>
           <a:p>
-            <a:pPr>
+            <a:pPr lvl="0" marL="457200" indent="-228600">
+              <a:buFont typeface="Calibri"/>
               <a:spcAft>
                 <a:spcPts val="1000"/>
               </a:spcAft>
+              <a:buSzPct val="100000"/>
               <a:buChar char="•"/>
               <a:lnSpc>
                 <a:spcPts val="2200"/>
@@ -20003,10 +20325,12 @@
           </a:bodyPr>
           <a:lstStyle/>
           <a:p>
-            <a:pPr>
+            <a:pPr lvl="0" marL="457200" indent="-228600">
+              <a:buFont typeface="Calibri"/>
               <a:spcAft>
                 <a:spcPts val="1000"/>
               </a:spcAft>
+              <a:buSzPct val="100000"/>
               <a:buChar char="•"/>
               <a:lnSpc>
                 <a:spcPts val="2200"/>
@@ -20023,10 +20347,12 @@
             </a:r>
           </a:p>
           <a:p>
-            <a:pPr>
+            <a:pPr lvl="0" marL="457200" indent="-228600">
+              <a:buFont typeface="Calibri"/>
               <a:spcAft>
                 <a:spcPts val="1000"/>
               </a:spcAft>
+              <a:buSzPct val="100000"/>
               <a:buChar char="•"/>
               <a:lnSpc>
                 <a:spcPts val="2200"/>
@@ -20162,10 +20488,12 @@
           </a:bodyPr>
           <a:lstStyle/>
           <a:p>
-            <a:pPr>
+            <a:pPr lvl="0" marL="457200" indent="-228600">
+              <a:buFont typeface="Calibri"/>
               <a:spcAft>
                 <a:spcPts val="1000"/>
               </a:spcAft>
+              <a:buSzPct val="100000"/>
               <a:buChar char="•"/>
               <a:lnSpc>
                 <a:spcPts val="2200"/>
@@ -20301,10 +20629,12 @@
           </a:bodyPr>
           <a:lstStyle/>
           <a:p>
-            <a:pPr>
+            <a:pPr lvl="0" marL="457200" indent="-228600">
+              <a:buFont typeface="Calibri"/>
               <a:spcAft>
                 <a:spcPts val="1000"/>
               </a:spcAft>
+              <a:buSzPct val="100000"/>
               <a:buChar char="•"/>
               <a:lnSpc>
                 <a:spcPts val="2200"/>
@@ -20321,10 +20651,12 @@
             </a:r>
           </a:p>
           <a:p>
-            <a:pPr>
+            <a:pPr lvl="0" marL="457200" indent="-228600">
+              <a:buFont typeface="Calibri"/>
               <a:spcAft>
                 <a:spcPts val="1000"/>
               </a:spcAft>
+              <a:buSzPct val="100000"/>
               <a:buChar char="•"/>
               <a:lnSpc>
                 <a:spcPts val="2200"/>
@@ -20341,10 +20673,12 @@
             </a:r>
           </a:p>
           <a:p>
-            <a:pPr>
+            <a:pPr lvl="0" marL="457200" indent="-228600">
+              <a:buFont typeface="Calibri"/>
               <a:spcAft>
                 <a:spcPts val="1000"/>
               </a:spcAft>
+              <a:buSzPct val="100000"/>
               <a:buChar char="•"/>
               <a:lnSpc>
                 <a:spcPts val="2200"/>
@@ -20480,10 +20814,12 @@
           </a:bodyPr>
           <a:lstStyle/>
           <a:p>
-            <a:pPr>
+            <a:pPr lvl="0" marL="457200" indent="-228600">
+              <a:buFont typeface="Calibri"/>
               <a:spcAft>
                 <a:spcPts val="1000"/>
               </a:spcAft>
+              <a:buSzPct val="100000"/>
               <a:buChar char="•"/>
               <a:lnSpc>
                 <a:spcPts val="2200"/>
@@ -20500,10 +20836,12 @@
             </a:r>
           </a:p>
           <a:p>
-            <a:pPr>
+            <a:pPr lvl="0" marL="457200" indent="-228600">
+              <a:buFont typeface="Calibri"/>
               <a:spcAft>
                 <a:spcPts val="1000"/>
               </a:spcAft>
+              <a:buSzPct val="100000"/>
               <a:buChar char="•"/>
               <a:lnSpc>
                 <a:spcPts val="2200"/>
@@ -20639,10 +20977,12 @@
           </a:bodyPr>
           <a:lstStyle/>
           <a:p>
-            <a:pPr>
+            <a:pPr lvl="0" marL="457200" indent="-228600">
+              <a:buFont typeface="Calibri"/>
               <a:spcAft>
                 <a:spcPts val="1000"/>
               </a:spcAft>
+              <a:buSzPct val="100000"/>
               <a:buChar char="•"/>
               <a:lnSpc>
                 <a:spcPts val="2200"/>
@@ -20659,10 +20999,12 @@
             </a:r>
           </a:p>
           <a:p>
-            <a:pPr>
+            <a:pPr lvl="0" marL="457200" indent="-228600">
+              <a:buFont typeface="Calibri"/>
               <a:spcAft>
                 <a:spcPts val="1000"/>
               </a:spcAft>
+              <a:buSzPct val="100000"/>
               <a:buChar char="•"/>
               <a:lnSpc>
                 <a:spcPts val="2200"/>
@@ -20679,10 +21021,12 @@
             </a:r>
           </a:p>
           <a:p>
-            <a:pPr>
+            <a:pPr lvl="0" marL="457200" indent="-228600">
+              <a:buFont typeface="Calibri"/>
               <a:spcAft>
                 <a:spcPts val="1000"/>
               </a:spcAft>
+              <a:buSzPct val="100000"/>
               <a:buChar char="•"/>
               <a:lnSpc>
                 <a:spcPts val="2200"/>
@@ -20699,10 +21043,12 @@
             </a:r>
           </a:p>
           <a:p>
-            <a:pPr>
+            <a:pPr lvl="0" marL="457200" indent="-228600">
+              <a:buFont typeface="Calibri"/>
               <a:spcAft>
                 <a:spcPts val="1000"/>
               </a:spcAft>
+              <a:buSzPct val="100000"/>
               <a:buChar char="•"/>
               <a:lnSpc>
                 <a:spcPts val="2200"/>
@@ -20838,10 +21184,12 @@
           </a:bodyPr>
           <a:lstStyle/>
           <a:p>
-            <a:pPr>
+            <a:pPr lvl="0" marL="457200" indent="-228600">
+              <a:buFont typeface="Calibri"/>
               <a:spcAft>
                 <a:spcPts val="1000"/>
               </a:spcAft>
+              <a:buSzPct val="100000"/>
               <a:buChar char="•"/>
               <a:lnSpc>
                 <a:spcPts val="2200"/>
@@ -20858,10 +21206,12 @@
             </a:r>
           </a:p>
           <a:p>
-            <a:pPr>
+            <a:pPr lvl="0" marL="457200" indent="-228600">
+              <a:buFont typeface="Calibri"/>
               <a:spcAft>
                 <a:spcPts val="1000"/>
               </a:spcAft>
+              <a:buSzPct val="100000"/>
               <a:buChar char="•"/>
               <a:lnSpc>
                 <a:spcPts val="2200"/>
@@ -20878,10 +21228,12 @@
             </a:r>
           </a:p>
           <a:p>
-            <a:pPr>
+            <a:pPr lvl="0" marL="457200" indent="-228600">
+              <a:buFont typeface="Calibri"/>
               <a:spcAft>
                 <a:spcPts val="1000"/>
               </a:spcAft>
+              <a:buSzPct val="100000"/>
               <a:buChar char="•"/>
               <a:lnSpc>
                 <a:spcPts val="2200"/>
@@ -21017,10 +21369,12 @@
           </a:bodyPr>
           <a:lstStyle/>
           <a:p>
-            <a:pPr>
+            <a:pPr lvl="0" marL="457200" indent="-228600">
+              <a:buFont typeface="Calibri"/>
               <a:spcAft>
                 <a:spcPts val="1000"/>
               </a:spcAft>
+              <a:buSzPct val="100000"/>
               <a:buChar char="•"/>
               <a:lnSpc>
                 <a:spcPts val="2200"/>
@@ -21037,10 +21391,12 @@
             </a:r>
           </a:p>
           <a:p>
-            <a:pPr>
+            <a:pPr lvl="0" marL="457200" indent="-228600">
+              <a:buFont typeface="Calibri"/>
               <a:spcAft>
                 <a:spcPts val="1000"/>
               </a:spcAft>
+              <a:buSzPct val="100000"/>
               <a:buChar char="•"/>
               <a:lnSpc>
                 <a:spcPts val="2200"/>
@@ -21057,10 +21413,12 @@
             </a:r>
           </a:p>
           <a:p>
-            <a:pPr>
+            <a:pPr lvl="0" marL="457200" indent="-228600">
+              <a:buFont typeface="Calibri"/>
               <a:spcAft>
                 <a:spcPts val="1000"/>
               </a:spcAft>
+              <a:buSzPct val="100000"/>
               <a:buChar char="•"/>
               <a:lnSpc>
                 <a:spcPts val="2200"/>
@@ -21077,10 +21435,12 @@
             </a:r>
           </a:p>
           <a:p>
-            <a:pPr>
+            <a:pPr lvl="0" marL="457200" indent="-228600">
+              <a:buFont typeface="Calibri"/>
               <a:spcAft>
                 <a:spcPts val="1000"/>
               </a:spcAft>
+              <a:buSzPct val="100000"/>
               <a:buChar char="•"/>
               <a:lnSpc>
                 <a:spcPts val="2200"/>
@@ -21679,10 +22039,12 @@
           </a:bodyPr>
           <a:lstStyle/>
           <a:p>
-            <a:pPr>
+            <a:pPr lvl="0" marL="457200" indent="-228600">
+              <a:buFont typeface="Calibri"/>
               <a:spcAft>
                 <a:spcPts val="1000"/>
               </a:spcAft>
+              <a:buSzPct val="100000"/>
               <a:buChar char="•"/>
               <a:lnSpc>
                 <a:spcPts val="2200"/>
@@ -21699,10 +22061,12 @@
             </a:r>
           </a:p>
           <a:p>
-            <a:pPr>
+            <a:pPr lvl="0" marL="457200" indent="-228600">
+              <a:buFont typeface="Calibri"/>
               <a:spcAft>
                 <a:spcPts val="1000"/>
               </a:spcAft>
+              <a:buSzPct val="100000"/>
               <a:buChar char="•"/>
               <a:lnSpc>
                 <a:spcPts val="2200"/>
@@ -21838,10 +22202,12 @@
           </a:bodyPr>
           <a:lstStyle/>
           <a:p>
-            <a:pPr>
+            <a:pPr lvl="0" marL="457200" indent="-228600">
+              <a:buFont typeface="Calibri"/>
               <a:spcAft>
                 <a:spcPts val="1000"/>
               </a:spcAft>
+              <a:buSzPct val="100000"/>
               <a:buChar char="•"/>
               <a:lnSpc>
                 <a:spcPts val="2200"/>
@@ -21858,10 +22224,12 @@
             </a:r>
           </a:p>
           <a:p>
-            <a:pPr>
+            <a:pPr lvl="0" marL="457200" indent="-228600">
+              <a:buFont typeface="Calibri"/>
               <a:spcAft>
                 <a:spcPts val="1000"/>
               </a:spcAft>
+              <a:buSzPct val="100000"/>
               <a:buChar char="•"/>
               <a:lnSpc>
                 <a:spcPts val="2200"/>
@@ -21878,10 +22246,12 @@
             </a:r>
           </a:p>
           <a:p>
-            <a:pPr>
+            <a:pPr lvl="0" marL="457200" indent="-228600">
+              <a:buFont typeface="Calibri"/>
               <a:spcAft>
                 <a:spcPts val="1000"/>
               </a:spcAft>
+              <a:buSzPct val="100000"/>
               <a:buChar char="•"/>
               <a:lnSpc>
                 <a:spcPts val="2200"/>
@@ -21898,10 +22268,12 @@
             </a:r>
           </a:p>
           <a:p>
-            <a:pPr>
+            <a:pPr lvl="0" marL="457200" indent="-228600">
+              <a:buFont typeface="Calibri"/>
               <a:spcAft>
                 <a:spcPts val="1000"/>
               </a:spcAft>
+              <a:buSzPct val="100000"/>
               <a:buChar char="•"/>
               <a:lnSpc>
                 <a:spcPts val="2200"/>
@@ -22215,10 +22587,12 @@
           </a:bodyPr>
           <a:lstStyle/>
           <a:p>
-            <a:pPr>
+            <a:pPr lvl="0" marL="457200" indent="-228600">
+              <a:buFont typeface="Calibri"/>
               <a:spcAft>
                 <a:spcPts val="1000"/>
               </a:spcAft>
+              <a:buSzPct val="100000"/>
               <a:buChar char="•"/>
               <a:lnSpc>
                 <a:spcPts val="2200"/>
@@ -22235,10 +22609,12 @@
             </a:r>
           </a:p>
           <a:p>
-            <a:pPr>
+            <a:pPr lvl="0" marL="457200" indent="-228600">
+              <a:buFont typeface="Calibri"/>
               <a:spcAft>
                 <a:spcPts val="1000"/>
               </a:spcAft>
+              <a:buSzPct val="100000"/>
               <a:buChar char="•"/>
               <a:lnSpc>
                 <a:spcPts val="2200"/>
@@ -22255,10 +22631,12 @@
             </a:r>
           </a:p>
           <a:p>
-            <a:pPr>
+            <a:pPr lvl="0" marL="457200" indent="-228600">
+              <a:buFont typeface="Calibri"/>
               <a:spcAft>
                 <a:spcPts val="1000"/>
               </a:spcAft>
+              <a:buSzPct val="100000"/>
               <a:buChar char="•"/>
               <a:lnSpc>
                 <a:spcPts val="2200"/>
@@ -22394,10 +22772,12 @@
           </a:bodyPr>
           <a:lstStyle/>
           <a:p>
-            <a:pPr>
+            <a:pPr lvl="0" marL="457200" indent="-228600">
+              <a:buFont typeface="Calibri"/>
               <a:spcAft>
                 <a:spcPts val="1000"/>
               </a:spcAft>
+              <a:buSzPct val="100000"/>
               <a:buChar char="•"/>
               <a:lnSpc>
                 <a:spcPts val="2200"/>
@@ -22414,10 +22794,12 @@
             </a:r>
           </a:p>
           <a:p>
-            <a:pPr>
+            <a:pPr lvl="0" marL="457200" indent="-228600">
+              <a:buFont typeface="Calibri"/>
               <a:spcAft>
                 <a:spcPts val="1000"/>
               </a:spcAft>
+              <a:buSzPct val="100000"/>
               <a:buChar char="•"/>
               <a:lnSpc>
                 <a:spcPts val="2200"/>
@@ -22553,10 +22935,12 @@
           </a:bodyPr>
           <a:lstStyle/>
           <a:p>
-            <a:pPr>
+            <a:pPr lvl="0" marL="457200" indent="-228600">
+              <a:buFont typeface="Calibri"/>
               <a:spcAft>
                 <a:spcPts val="1000"/>
               </a:spcAft>
+              <a:buSzPct val="100000"/>
               <a:buChar char="•"/>
               <a:lnSpc>
                 <a:spcPts val="2200"/>
@@ -22573,10 +22957,12 @@
             </a:r>
           </a:p>
           <a:p>
-            <a:pPr>
+            <a:pPr lvl="0" marL="457200" indent="-228600">
+              <a:buFont typeface="Calibri"/>
               <a:spcAft>
                 <a:spcPts val="1000"/>
               </a:spcAft>
+              <a:buSzPct val="100000"/>
               <a:buChar char="•"/>
               <a:lnSpc>
                 <a:spcPts val="2200"/>
@@ -22593,10 +22979,12 @@
             </a:r>
           </a:p>
           <a:p>
-            <a:pPr>
+            <a:pPr lvl="0" marL="457200" indent="-228600">
+              <a:buFont typeface="Calibri"/>
               <a:spcAft>
                 <a:spcPts val="1000"/>
               </a:spcAft>
+              <a:buSzPct val="100000"/>
               <a:buChar char="•"/>
               <a:lnSpc>
                 <a:spcPts val="2200"/>
@@ -22613,10 +23001,12 @@
             </a:r>
           </a:p>
           <a:p>
-            <a:pPr>
+            <a:pPr lvl="0" marL="457200" indent="-228600">
+              <a:buFont typeface="Calibri"/>
               <a:spcAft>
                 <a:spcPts val="1000"/>
               </a:spcAft>
+              <a:buSzPct val="100000"/>
               <a:buChar char="•"/>
               <a:lnSpc>
                 <a:spcPts val="2200"/>
@@ -22633,10 +23023,12 @@
             </a:r>
           </a:p>
           <a:p>
-            <a:pPr>
+            <a:pPr lvl="0" marL="457200" indent="-228600">
+              <a:buFont typeface="Calibri"/>
               <a:spcAft>
                 <a:spcPts val="1000"/>
               </a:spcAft>
+              <a:buSzPct val="100000"/>
               <a:buChar char="•"/>
               <a:lnSpc>
                 <a:spcPts val="2200"/>
@@ -22653,10 +23045,12 @@
             </a:r>
           </a:p>
           <a:p>
-            <a:pPr>
+            <a:pPr lvl="0" marL="457200" indent="-228600">
+              <a:buFont typeface="Calibri"/>
               <a:spcAft>
                 <a:spcPts val="1000"/>
               </a:spcAft>
+              <a:buSzPct val="100000"/>
               <a:buChar char="•"/>
               <a:lnSpc>
                 <a:spcPts val="2200"/>
@@ -22792,10 +23186,12 @@
           </a:bodyPr>
           <a:lstStyle/>
           <a:p>
-            <a:pPr>
+            <a:pPr lvl="0" marL="457200" indent="-228600">
+              <a:buFont typeface="Calibri"/>
               <a:spcAft>
                 <a:spcPts val="1000"/>
               </a:spcAft>
+              <a:buSzPct val="100000"/>
               <a:buChar char="•"/>
               <a:lnSpc>
                 <a:spcPts val="2200"/>
@@ -22931,10 +23327,12 @@
           </a:bodyPr>
           <a:lstStyle/>
           <a:p>
-            <a:pPr>
+            <a:pPr lvl="0" marL="457200" indent="-228600">
+              <a:buFont typeface="Calibri"/>
               <a:spcAft>
                 <a:spcPts val="1000"/>
               </a:spcAft>
+              <a:buSzPct val="100000"/>
               <a:buChar char="•"/>
               <a:lnSpc>
                 <a:spcPts val="2200"/>
@@ -22951,10 +23349,12 @@
             </a:r>
           </a:p>
           <a:p>
-            <a:pPr>
+            <a:pPr lvl="0" marL="457200" indent="-228600">
+              <a:buFont typeface="Calibri"/>
               <a:spcAft>
                 <a:spcPts val="1000"/>
               </a:spcAft>
+              <a:buSzPct val="100000"/>
               <a:buChar char="•"/>
               <a:lnSpc>
                 <a:spcPts val="2200"/>
@@ -22971,10 +23371,12 @@
             </a:r>
           </a:p>
           <a:p>
-            <a:pPr>
+            <a:pPr lvl="0" marL="457200" indent="-228600">
+              <a:buFont typeface="Calibri"/>
               <a:spcAft>
                 <a:spcPts val="1000"/>
               </a:spcAft>
+              <a:buSzPct val="100000"/>
               <a:buChar char="•"/>
               <a:lnSpc>
                 <a:spcPts val="2200"/>
@@ -23110,10 +23512,12 @@
           </a:bodyPr>
           <a:lstStyle/>
           <a:p>
-            <a:pPr>
+            <a:pPr lvl="0" marL="457200" indent="-228600">
+              <a:buFont typeface="Calibri"/>
               <a:spcAft>
                 <a:spcPts val="1000"/>
               </a:spcAft>
+              <a:buSzPct val="100000"/>
               <a:buChar char="•"/>
               <a:lnSpc>
                 <a:spcPts val="2200"/>
@@ -23130,10 +23534,12 @@
             </a:r>
           </a:p>
           <a:p>
-            <a:pPr>
+            <a:pPr lvl="0" marL="457200" indent="-228600">
+              <a:buFont typeface="Calibri"/>
               <a:spcAft>
                 <a:spcPts val="1000"/>
               </a:spcAft>
+              <a:buSzPct val="100000"/>
               <a:buChar char="•"/>
               <a:lnSpc>
                 <a:spcPts val="2200"/>
@@ -23150,10 +23556,12 @@
             </a:r>
           </a:p>
           <a:p>
-            <a:pPr>
+            <a:pPr lvl="0" marL="457200" indent="-228600">
+              <a:buFont typeface="Calibri"/>
               <a:spcAft>
                 <a:spcPts val="1000"/>
               </a:spcAft>
+              <a:buSzPct val="100000"/>
               <a:buChar char="•"/>
               <a:lnSpc>
                 <a:spcPts val="2200"/>
@@ -23170,10 +23578,12 @@
             </a:r>
           </a:p>
           <a:p>
-            <a:pPr>
+            <a:pPr lvl="0" marL="457200" indent="-228600">
+              <a:buFont typeface="Calibri"/>
               <a:spcAft>
                 <a:spcPts val="1000"/>
               </a:spcAft>
+              <a:buSzPct val="100000"/>
               <a:buChar char="•"/>
               <a:lnSpc>
                 <a:spcPts val="2200"/>
@@ -23677,10 +24087,12 @@
           </a:bodyPr>
           <a:lstStyle/>
           <a:p>
-            <a:pPr>
+            <a:pPr lvl="0" marL="457200" indent="-228600">
+              <a:buFont typeface="Calibri"/>
               <a:spcAft>
                 <a:spcPts val="1000"/>
               </a:spcAft>
+              <a:buSzPct val="100000"/>
               <a:buChar char="•"/>
               <a:lnSpc>
                 <a:spcPts val="2200"/>
@@ -23697,10 +24109,12 @@
             </a:r>
           </a:p>
           <a:p>
-            <a:pPr>
+            <a:pPr lvl="0" marL="457200" indent="-228600">
+              <a:buFont typeface="Calibri"/>
               <a:spcAft>
                 <a:spcPts val="1000"/>
               </a:spcAft>
+              <a:buSzPct val="100000"/>
               <a:buChar char="•"/>
               <a:lnSpc>
                 <a:spcPts val="2200"/>
@@ -23717,10 +24131,12 @@
             </a:r>
           </a:p>
           <a:p>
-            <a:pPr>
+            <a:pPr lvl="0" marL="457200" indent="-228600">
+              <a:buFont typeface="Calibri"/>
               <a:spcAft>
                 <a:spcPts val="1000"/>
               </a:spcAft>
+              <a:buSzPct val="100000"/>
               <a:buChar char="•"/>
               <a:lnSpc>
                 <a:spcPts val="2200"/>
@@ -23856,10 +24272,12 @@
           </a:bodyPr>
           <a:lstStyle/>
           <a:p>
-            <a:pPr>
+            <a:pPr lvl="0" marL="457200" indent="-228600">
+              <a:buFont typeface="Calibri"/>
               <a:spcAft>
                 <a:spcPts val="1000"/>
               </a:spcAft>
+              <a:buSzPct val="100000"/>
               <a:buChar char="•"/>
               <a:lnSpc>
                 <a:spcPts val="2200"/>
@@ -23876,10 +24294,12 @@
             </a:r>
           </a:p>
           <a:p>
-            <a:pPr>
+            <a:pPr lvl="0" marL="457200" indent="-228600">
+              <a:buFont typeface="Calibri"/>
               <a:spcAft>
                 <a:spcPts val="1000"/>
               </a:spcAft>
+              <a:buSzPct val="100000"/>
               <a:buChar char="•"/>
               <a:lnSpc>
                 <a:spcPts val="2200"/>
@@ -23896,10 +24316,12 @@
             </a:r>
           </a:p>
           <a:p>
-            <a:pPr>
+            <a:pPr lvl="0" marL="457200" indent="-228600">
+              <a:buFont typeface="Calibri"/>
               <a:spcAft>
                 <a:spcPts val="1000"/>
               </a:spcAft>
+              <a:buSzPct val="100000"/>
               <a:buChar char="•"/>
               <a:lnSpc>
                 <a:spcPts val="2200"/>
@@ -23916,10 +24338,12 @@
             </a:r>
           </a:p>
           <a:p>
-            <a:pPr>
+            <a:pPr lvl="0" marL="457200" indent="-228600">
+              <a:buFont typeface="Calibri"/>
               <a:spcAft>
                 <a:spcPts val="1000"/>
               </a:spcAft>
+              <a:buSzPct val="100000"/>
               <a:buChar char="•"/>
               <a:lnSpc>
                 <a:spcPts val="2200"/>
@@ -24055,10 +24479,12 @@
           </a:bodyPr>
           <a:lstStyle/>
           <a:p>
-            <a:pPr>
+            <a:pPr lvl="0" marL="457200" indent="-228600">
+              <a:buFont typeface="Calibri"/>
               <a:spcAft>
                 <a:spcPts val="1000"/>
               </a:spcAft>
+              <a:buSzPct val="100000"/>
               <a:buChar char="•"/>
               <a:lnSpc>
                 <a:spcPts val="2200"/>
@@ -24075,10 +24501,12 @@
             </a:r>
           </a:p>
           <a:p>
-            <a:pPr>
+            <a:pPr lvl="0" marL="457200" indent="-228600">
+              <a:buFont typeface="Calibri"/>
               <a:spcAft>
                 <a:spcPts val="1000"/>
               </a:spcAft>
+              <a:buSzPct val="100000"/>
               <a:buChar char="•"/>
               <a:lnSpc>
                 <a:spcPts val="2200"/>
@@ -24095,10 +24523,12 @@
             </a:r>
           </a:p>
           <a:p>
-            <a:pPr>
+            <a:pPr lvl="0" marL="457200" indent="-228600">
+              <a:buFont typeface="Calibri"/>
               <a:spcAft>
                 <a:spcPts val="1000"/>
               </a:spcAft>
+              <a:buSzPct val="100000"/>
               <a:buChar char="•"/>
               <a:lnSpc>
                 <a:spcPts val="2200"/>
@@ -24234,10 +24664,12 @@
           </a:bodyPr>
           <a:lstStyle/>
           <a:p>
-            <a:pPr>
+            <a:pPr lvl="0" marL="457200" indent="-228600">
+              <a:buFont typeface="Calibri"/>
               <a:spcAft>
                 <a:spcPts val="1000"/>
               </a:spcAft>
+              <a:buSzPct val="100000"/>
               <a:buChar char="•"/>
               <a:lnSpc>
                 <a:spcPts val="2200"/>
@@ -24254,10 +24686,12 @@
             </a:r>
           </a:p>
           <a:p>
-            <a:pPr>
+            <a:pPr lvl="0" marL="457200" indent="-228600">
+              <a:buFont typeface="Calibri"/>
               <a:spcAft>
                 <a:spcPts val="1000"/>
               </a:spcAft>
+              <a:buSzPct val="100000"/>
               <a:buChar char="•"/>
               <a:lnSpc>
                 <a:spcPts val="2200"/>
@@ -24274,10 +24708,12 @@
             </a:r>
           </a:p>
           <a:p>
-            <a:pPr>
+            <a:pPr lvl="0" marL="457200" indent="-228600">
+              <a:buFont typeface="Calibri"/>
               <a:spcAft>
                 <a:spcPts val="1000"/>
               </a:spcAft>
+              <a:buSzPct val="100000"/>
               <a:buChar char="•"/>
               <a:lnSpc>
                 <a:spcPts val="2200"/>
@@ -24294,10 +24730,12 @@
             </a:r>
           </a:p>
           <a:p>
-            <a:pPr>
+            <a:pPr lvl="0" marL="457200" indent="-228600">
+              <a:buFont typeface="Calibri"/>
               <a:spcAft>
                 <a:spcPts val="1000"/>
               </a:spcAft>
+              <a:buSzPct val="100000"/>
               <a:buChar char="•"/>
               <a:lnSpc>
                 <a:spcPts val="2200"/>
@@ -24314,10 +24752,12 @@
             </a:r>
           </a:p>
           <a:p>
-            <a:pPr>
+            <a:pPr lvl="0" marL="457200" indent="-228600">
+              <a:buFont typeface="Calibri"/>
               <a:spcAft>
                 <a:spcPts val="1000"/>
               </a:spcAft>
+              <a:buSzPct val="100000"/>
               <a:buChar char="•"/>
               <a:lnSpc>
                 <a:spcPts val="2200"/>
@@ -24453,10 +24893,12 @@
           </a:bodyPr>
           <a:lstStyle/>
           <a:p>
-            <a:pPr>
+            <a:pPr lvl="0" marL="457200" indent="-228600">
+              <a:buFont typeface="Calibri"/>
               <a:spcAft>
                 <a:spcPts val="1000"/>
               </a:spcAft>
+              <a:buSzPct val="100000"/>
               <a:buChar char="•"/>
               <a:lnSpc>
                 <a:spcPts val="2200"/>
@@ -24473,10 +24915,12 @@
             </a:r>
           </a:p>
           <a:p>
-            <a:pPr>
+            <a:pPr lvl="0" marL="457200" indent="-228600">
+              <a:buFont typeface="Calibri"/>
               <a:spcAft>
                 <a:spcPts val="1000"/>
               </a:spcAft>
+              <a:buSzPct val="100000"/>
               <a:buChar char="•"/>
               <a:lnSpc>
                 <a:spcPts val="2200"/>
@@ -24612,10 +25056,12 @@
           </a:bodyPr>
           <a:lstStyle/>
           <a:p>
-            <a:pPr>
+            <a:pPr lvl="0" marL="457200" indent="-228600">
+              <a:buFont typeface="Calibri"/>
               <a:spcAft>
                 <a:spcPts val="1000"/>
               </a:spcAft>
+              <a:buSzPct val="100000"/>
               <a:buChar char="•"/>
               <a:lnSpc>
                 <a:spcPts val="2200"/>
@@ -24632,10 +25078,12 @@
             </a:r>
           </a:p>
           <a:p>
-            <a:pPr>
+            <a:pPr lvl="0" marL="457200" indent="-228600">
+              <a:buFont typeface="Calibri"/>
               <a:spcAft>
                 <a:spcPts val="1000"/>
               </a:spcAft>
+              <a:buSzPct val="100000"/>
               <a:buChar char="•"/>
               <a:lnSpc>
                 <a:spcPts val="2200"/>
@@ -24771,10 +25219,12 @@
           </a:bodyPr>
           <a:lstStyle/>
           <a:p>
-            <a:pPr>
+            <a:pPr lvl="0" marL="457200" indent="-228600">
+              <a:buFont typeface="Calibri"/>
               <a:spcAft>
                 <a:spcPts val="1000"/>
               </a:spcAft>
+              <a:buSzPct val="100000"/>
               <a:buChar char="•"/>
               <a:lnSpc>
                 <a:spcPts val="2200"/>
@@ -24791,10 +25241,12 @@
             </a:r>
           </a:p>
           <a:p>
-            <a:pPr>
+            <a:pPr lvl="0" marL="457200" indent="-228600">
+              <a:buFont typeface="Calibri"/>
               <a:spcAft>
                 <a:spcPts val="1000"/>
               </a:spcAft>
+              <a:buSzPct val="100000"/>
               <a:buChar char="•"/>
               <a:lnSpc>
                 <a:spcPts val="2200"/>
@@ -24811,10 +25263,12 @@
             </a:r>
           </a:p>
           <a:p>
-            <a:pPr>
+            <a:pPr lvl="0" marL="457200" indent="-228600">
+              <a:buFont typeface="Calibri"/>
               <a:spcAft>
                 <a:spcPts val="1000"/>
               </a:spcAft>
+              <a:buSzPct val="100000"/>
               <a:buChar char="•"/>
               <a:lnSpc>
                 <a:spcPts val="2200"/>
@@ -24831,10 +25285,12 @@
             </a:r>
           </a:p>
           <a:p>
-            <a:pPr>
+            <a:pPr lvl="0" marL="457200" indent="-228600">
+              <a:buFont typeface="Calibri"/>
               <a:spcAft>
                 <a:spcPts val="1000"/>
               </a:spcAft>
+              <a:buSzPct val="100000"/>
               <a:buChar char="•"/>
               <a:lnSpc>
                 <a:spcPts val="2200"/>
@@ -24851,10 +25307,12 @@
             </a:r>
           </a:p>
           <a:p>
-            <a:pPr>
+            <a:pPr lvl="0" marL="457200" indent="-228600">
+              <a:buFont typeface="Calibri"/>
               <a:spcAft>
                 <a:spcPts val="1000"/>
               </a:spcAft>
+              <a:buSzPct val="100000"/>
               <a:buChar char="•"/>
               <a:lnSpc>
                 <a:spcPts val="2200"/>
@@ -24871,10 +25329,12 @@
             </a:r>
           </a:p>
           <a:p>
-            <a:pPr>
+            <a:pPr lvl="0" marL="457200" indent="-228600">
+              <a:buFont typeface="Calibri"/>
               <a:spcAft>
                 <a:spcPts val="1000"/>
               </a:spcAft>
+              <a:buSzPct val="100000"/>
               <a:buChar char="•"/>
               <a:lnSpc>
                 <a:spcPts val="2200"/>
@@ -25010,10 +25470,12 @@
           </a:bodyPr>
           <a:lstStyle/>
           <a:p>
-            <a:pPr>
+            <a:pPr lvl="0" marL="457200" indent="-228600">
+              <a:buFont typeface="Calibri"/>
               <a:spcAft>
                 <a:spcPts val="1000"/>
               </a:spcAft>
+              <a:buSzPct val="100000"/>
               <a:buChar char="•"/>
               <a:lnSpc>
                 <a:spcPts val="2200"/>
@@ -25149,10 +25611,12 @@
           </a:bodyPr>
           <a:lstStyle/>
           <a:p>
-            <a:pPr>
+            <a:pPr lvl="0" marL="457200" indent="-228600">
+              <a:buFont typeface="Calibri"/>
               <a:spcAft>
                 <a:spcPts val="1000"/>
               </a:spcAft>
+              <a:buSzPct val="100000"/>
               <a:buChar char="•"/>
               <a:lnSpc>
                 <a:spcPts val="2200"/>
@@ -25169,10 +25633,12 @@
             </a:r>
           </a:p>
           <a:p>
-            <a:pPr>
+            <a:pPr lvl="0" marL="457200" indent="-228600">
+              <a:buFont typeface="Calibri"/>
               <a:spcAft>
                 <a:spcPts val="1000"/>
               </a:spcAft>
+              <a:buSzPct val="100000"/>
               <a:buChar char="•"/>
               <a:lnSpc>
                 <a:spcPts val="2200"/>
@@ -25189,10 +25655,12 @@
             </a:r>
           </a:p>
           <a:p>
-            <a:pPr>
+            <a:pPr lvl="0" marL="457200" indent="-228600">
+              <a:buFont typeface="Calibri"/>
               <a:spcAft>
                 <a:spcPts val="1000"/>
               </a:spcAft>
+              <a:buSzPct val="100000"/>
               <a:buChar char="•"/>
               <a:lnSpc>
                 <a:spcPts val="2200"/>
@@ -25209,10 +25677,12 @@
             </a:r>
           </a:p>
           <a:p>
-            <a:pPr>
+            <a:pPr lvl="0" marL="457200" indent="-228600">
+              <a:buFont typeface="Calibri"/>
               <a:spcAft>
                 <a:spcPts val="1000"/>
               </a:spcAft>
+              <a:buSzPct val="100000"/>
               <a:buChar char="•"/>
               <a:lnSpc>
                 <a:spcPts val="2200"/>
@@ -25348,10 +25818,12 @@
           </a:bodyPr>
           <a:lstStyle/>
           <a:p>
-            <a:pPr>
+            <a:pPr lvl="0" marL="457200" indent="-228600">
+              <a:buFont typeface="Calibri"/>
               <a:spcAft>
                 <a:spcPts val="1000"/>
               </a:spcAft>
+              <a:buSzPct val="100000"/>
               <a:buChar char="•"/>
               <a:lnSpc>
                 <a:spcPts val="2200"/>
@@ -25368,10 +25840,12 @@
             </a:r>
           </a:p>
           <a:p>
-            <a:pPr>
+            <a:pPr lvl="0" marL="457200" indent="-228600">
+              <a:buFont typeface="Calibri"/>
               <a:spcAft>
                 <a:spcPts val="1000"/>
               </a:spcAft>
+              <a:buSzPct val="100000"/>
               <a:buChar char="•"/>
               <a:lnSpc>
                 <a:spcPts val="2200"/>
@@ -25388,10 +25862,12 @@
             </a:r>
           </a:p>
           <a:p>
-            <a:pPr>
+            <a:pPr lvl="0" marL="457200" indent="-228600">
+              <a:buFont typeface="Calibri"/>
               <a:spcAft>
                 <a:spcPts val="1000"/>
               </a:spcAft>
+              <a:buSzPct val="100000"/>
               <a:buChar char="•"/>
               <a:lnSpc>
                 <a:spcPts val="2200"/>
@@ -25408,10 +25884,12 @@
             </a:r>
           </a:p>
           <a:p>
-            <a:pPr>
+            <a:pPr lvl="0" marL="457200" indent="-228600">
+              <a:buFont typeface="Calibri"/>
               <a:spcAft>
                 <a:spcPts val="1000"/>
               </a:spcAft>
+              <a:buSzPct val="100000"/>
               <a:buChar char="•"/>
               <a:lnSpc>
                 <a:spcPts val="2200"/>
@@ -25428,10 +25906,12 @@
             </a:r>
           </a:p>
           <a:p>
-            <a:pPr>
+            <a:pPr lvl="0" marL="457200" indent="-228600">
+              <a:buFont typeface="Calibri"/>
               <a:spcAft>
                 <a:spcPts val="1000"/>
               </a:spcAft>
+              <a:buSzPct val="100000"/>
               <a:buChar char="•"/>
               <a:lnSpc>
                 <a:spcPts val="2200"/>
@@ -25840,10 +26320,12 @@
           </a:bodyPr>
           <a:lstStyle/>
           <a:p>
-            <a:pPr>
+            <a:pPr lvl="0" marL="457200" indent="-228600">
+              <a:buFont typeface="Calibri"/>
               <a:spcAft>
                 <a:spcPts val="1000"/>
               </a:spcAft>
+              <a:buSzPct val="100000"/>
               <a:buChar char="•"/>
               <a:lnSpc>
                 <a:spcPts val="2200"/>
@@ -25860,10 +26342,12 @@
             </a:r>
           </a:p>
           <a:p>
-            <a:pPr>
+            <a:pPr lvl="0" marL="457200" indent="-228600">
+              <a:buFont typeface="Calibri"/>
               <a:spcAft>
                 <a:spcPts val="1000"/>
               </a:spcAft>
+              <a:buSzPct val="100000"/>
               <a:buChar char="•"/>
               <a:lnSpc>
                 <a:spcPts val="2200"/>
@@ -25880,10 +26364,12 @@
             </a:r>
           </a:p>
           <a:p>
-            <a:pPr>
+            <a:pPr lvl="0" marL="457200" indent="-228600">
+              <a:buFont typeface="Calibri"/>
               <a:spcAft>
                 <a:spcPts val="1000"/>
               </a:spcAft>
+              <a:buSzPct val="100000"/>
               <a:buChar char="•"/>
               <a:lnSpc>
                 <a:spcPts val="2200"/>
@@ -25900,10 +26386,12 @@
             </a:r>
           </a:p>
           <a:p>
-            <a:pPr>
+            <a:pPr lvl="0" marL="457200" indent="-228600">
+              <a:buFont typeface="Calibri"/>
               <a:spcAft>
                 <a:spcPts val="1000"/>
               </a:spcAft>
+              <a:buSzPct val="100000"/>
               <a:buChar char="•"/>
               <a:lnSpc>
                 <a:spcPts val="2200"/>
@@ -25920,10 +26408,12 @@
             </a:r>
           </a:p>
           <a:p>
-            <a:pPr>
+            <a:pPr lvl="0" marL="457200" indent="-228600">
+              <a:buFont typeface="Calibri"/>
               <a:spcAft>
                 <a:spcPts val="1000"/>
               </a:spcAft>
+              <a:buSzPct val="100000"/>
               <a:buChar char="•"/>
               <a:lnSpc>
                 <a:spcPts val="2200"/>
@@ -26237,10 +26727,12 @@
           </a:bodyPr>
           <a:lstStyle/>
           <a:p>
-            <a:pPr>
+            <a:pPr lvl="0" marL="457200" indent="-228600">
+              <a:buFont typeface="Calibri"/>
               <a:spcAft>
                 <a:spcPts val="1000"/>
               </a:spcAft>
+              <a:buSzPct val="100000"/>
               <a:buChar char="•"/>
               <a:lnSpc>
                 <a:spcPts val="2200"/>
@@ -26257,10 +26749,12 @@
             </a:r>
           </a:p>
           <a:p>
-            <a:pPr>
+            <a:pPr lvl="0" marL="457200" indent="-228600">
+              <a:buFont typeface="Calibri"/>
               <a:spcAft>
                 <a:spcPts val="1000"/>
               </a:spcAft>
+              <a:buSzPct val="100000"/>
               <a:buChar char="•"/>
               <a:lnSpc>
                 <a:spcPts val="2200"/>
@@ -26277,10 +26771,12 @@
             </a:r>
           </a:p>
           <a:p>
-            <a:pPr>
+            <a:pPr lvl="0" marL="457200" indent="-228600">
+              <a:buFont typeface="Calibri"/>
               <a:spcAft>
                 <a:spcPts val="1000"/>
               </a:spcAft>
+              <a:buSzPct val="100000"/>
               <a:buChar char="•"/>
               <a:lnSpc>
                 <a:spcPts val="2200"/>
@@ -26297,10 +26793,12 @@
             </a:r>
           </a:p>
           <a:p>
-            <a:pPr>
+            <a:pPr lvl="0" marL="457200" indent="-228600">
+              <a:buFont typeface="Calibri"/>
               <a:spcAft>
                 <a:spcPts val="1000"/>
               </a:spcAft>
+              <a:buSzPct val="100000"/>
               <a:buChar char="•"/>
               <a:lnSpc>
                 <a:spcPts val="2200"/>
@@ -26317,10 +26815,12 @@
             </a:r>
           </a:p>
           <a:p>
-            <a:pPr>
+            <a:pPr lvl="0" marL="457200" indent="-228600">
+              <a:buFont typeface="Calibri"/>
               <a:spcAft>
                 <a:spcPts val="1000"/>
               </a:spcAft>
+              <a:buSzPct val="100000"/>
               <a:buChar char="•"/>
               <a:lnSpc>
                 <a:spcPts val="2200"/>
@@ -26615,10 +27115,12 @@
           </a:bodyPr>
           <a:lstStyle/>
           <a:p>
-            <a:pPr>
+            <a:pPr lvl="0" marL="457200" indent="-228600">
+              <a:buFont typeface="Calibri"/>
               <a:spcAft>
                 <a:spcPts val="1000"/>
               </a:spcAft>
+              <a:buSzPct val="100000"/>
               <a:buChar char="•"/>
               <a:lnSpc>
                 <a:spcPts val="2200"/>
@@ -26635,10 +27137,12 @@
             </a:r>
           </a:p>
           <a:p>
-            <a:pPr>
+            <a:pPr lvl="0" marL="457200" indent="-228600">
+              <a:buFont typeface="Calibri"/>
               <a:spcAft>
                 <a:spcPts val="1000"/>
               </a:spcAft>
+              <a:buSzPct val="100000"/>
               <a:buChar char="•"/>
               <a:lnSpc>
                 <a:spcPts val="2200"/>
@@ -26655,10 +27159,12 @@
             </a:r>
           </a:p>
           <a:p>
-            <a:pPr>
+            <a:pPr lvl="0" marL="457200" indent="-228600">
+              <a:buFont typeface="Calibri"/>
               <a:spcAft>
                 <a:spcPts val="1000"/>
               </a:spcAft>
+              <a:buSzPct val="100000"/>
               <a:buChar char="•"/>
               <a:lnSpc>
                 <a:spcPts val="2200"/>
@@ -26675,10 +27181,12 @@
             </a:r>
           </a:p>
           <a:p>
-            <a:pPr>
+            <a:pPr lvl="0" marL="457200" indent="-228600">
+              <a:buFont typeface="Calibri"/>
               <a:spcAft>
                 <a:spcPts val="1000"/>
               </a:spcAft>
+              <a:buSzPct val="100000"/>
               <a:buChar char="•"/>
               <a:lnSpc>
                 <a:spcPts val="2200"/>
@@ -26814,10 +27322,12 @@
           </a:bodyPr>
           <a:lstStyle/>
           <a:p>
-            <a:pPr>
+            <a:pPr lvl="0" marL="457200" indent="-228600">
+              <a:buFont typeface="Calibri"/>
               <a:spcAft>
                 <a:spcPts val="1000"/>
               </a:spcAft>
+              <a:buSzPct val="100000"/>
               <a:buChar char="•"/>
               <a:lnSpc>
                 <a:spcPts val="2200"/>
@@ -26834,10 +27344,12 @@
             </a:r>
           </a:p>
           <a:p>
-            <a:pPr>
+            <a:pPr lvl="0" marL="457200" indent="-228600">
+              <a:buFont typeface="Calibri"/>
               <a:spcAft>
                 <a:spcPts val="1000"/>
               </a:spcAft>
+              <a:buSzPct val="100000"/>
               <a:buChar char="•"/>
               <a:lnSpc>
                 <a:spcPts val="2200"/>
@@ -26973,10 +27485,12 @@
           </a:bodyPr>
           <a:lstStyle/>
           <a:p>
-            <a:pPr>
+            <a:pPr lvl="0" marL="457200" indent="-228600">
+              <a:buFont typeface="Calibri"/>
               <a:spcAft>
                 <a:spcPts val="1000"/>
               </a:spcAft>
+              <a:buSzPct val="100000"/>
               <a:buChar char="•"/>
               <a:lnSpc>
                 <a:spcPts val="2200"/>
@@ -26993,10 +27507,12 @@
             </a:r>
           </a:p>
           <a:p>
-            <a:pPr>
+            <a:pPr lvl="0" marL="457200" indent="-228600">
+              <a:buFont typeface="Calibri"/>
               <a:spcAft>
                 <a:spcPts val="1000"/>
               </a:spcAft>
+              <a:buSzPct val="100000"/>
               <a:buChar char="•"/>
               <a:lnSpc>
                 <a:spcPts val="2200"/>
@@ -27013,10 +27529,12 @@
             </a:r>
           </a:p>
           <a:p>
-            <a:pPr>
+            <a:pPr lvl="0" marL="457200" indent="-228600">
+              <a:buFont typeface="Calibri"/>
               <a:spcAft>
                 <a:spcPts val="1000"/>
               </a:spcAft>
+              <a:buSzPct val="100000"/>
               <a:buChar char="•"/>
               <a:lnSpc>
                 <a:spcPts val="2200"/>
@@ -27152,10 +27670,12 @@
           </a:bodyPr>
           <a:lstStyle/>
           <a:p>
-            <a:pPr>
+            <a:pPr lvl="0" marL="457200" indent="-228600">
+              <a:buFont typeface="Calibri"/>
               <a:spcAft>
                 <a:spcPts val="1000"/>
               </a:spcAft>
+              <a:buSzPct val="100000"/>
               <a:buChar char="•"/>
               <a:lnSpc>
                 <a:spcPts val="2200"/>
@@ -27172,10 +27692,12 @@
             </a:r>
           </a:p>
           <a:p>
-            <a:pPr>
+            <a:pPr lvl="0" marL="457200" indent="-228600">
+              <a:buFont typeface="Calibri"/>
               <a:spcAft>
                 <a:spcPts val="1000"/>
               </a:spcAft>
+              <a:buSzPct val="100000"/>
               <a:buChar char="•"/>
               <a:lnSpc>
                 <a:spcPts val="2200"/>
@@ -27311,10 +27833,12 @@
           </a:bodyPr>
           <a:lstStyle/>
           <a:p>
-            <a:pPr>
+            <a:pPr lvl="0" marL="457200" indent="-228600">
+              <a:buFont typeface="Calibri"/>
               <a:spcAft>
                 <a:spcPts val="1000"/>
               </a:spcAft>
+              <a:buSzPct val="100000"/>
               <a:buChar char="•"/>
               <a:lnSpc>
                 <a:spcPts val="2200"/>
@@ -27450,10 +27974,12 @@
           </a:bodyPr>
           <a:lstStyle/>
           <a:p>
-            <a:pPr>
+            <a:pPr lvl="0" marL="457200" indent="-228600">
+              <a:buFont typeface="Calibri"/>
               <a:spcAft>
                 <a:spcPts val="1000"/>
               </a:spcAft>
+              <a:buSzPct val="100000"/>
               <a:buChar char="•"/>
               <a:lnSpc>
                 <a:spcPts val="2200"/>
@@ -27470,10 +27996,12 @@
             </a:r>
           </a:p>
           <a:p>
-            <a:pPr>
+            <a:pPr lvl="0" marL="457200" indent="-228600">
+              <a:buFont typeface="Calibri"/>
               <a:spcAft>
                 <a:spcPts val="1000"/>
               </a:spcAft>
+              <a:buSzPct val="100000"/>
               <a:buChar char="•"/>
               <a:lnSpc>
                 <a:spcPts val="2200"/>
@@ -27490,10 +28018,12 @@
             </a:r>
           </a:p>
           <a:p>
-            <a:pPr>
+            <a:pPr lvl="0" marL="457200" indent="-228600">
+              <a:buFont typeface="Calibri"/>
               <a:spcAft>
                 <a:spcPts val="1000"/>
               </a:spcAft>
+              <a:buSzPct val="100000"/>
               <a:buChar char="•"/>
               <a:lnSpc>
                 <a:spcPts val="2200"/>
@@ -27629,10 +28159,12 @@
           </a:bodyPr>
           <a:lstStyle/>
           <a:p>
-            <a:pPr>
+            <a:pPr lvl="0" marL="457200" indent="-228600">
+              <a:buFont typeface="Calibri"/>
               <a:spcAft>
                 <a:spcPts val="1000"/>
               </a:spcAft>
+              <a:buSzPct val="100000"/>
               <a:buChar char="•"/>
               <a:lnSpc>
                 <a:spcPts val="2200"/>
@@ -27649,10 +28181,12 @@
             </a:r>
           </a:p>
           <a:p>
-            <a:pPr>
+            <a:pPr lvl="0" marL="457200" indent="-228600">
+              <a:buFont typeface="Calibri"/>
               <a:spcAft>
                 <a:spcPts val="1000"/>
               </a:spcAft>
+              <a:buSzPct val="100000"/>
               <a:buChar char="•"/>
               <a:lnSpc>
                 <a:spcPts val="2200"/>
@@ -27669,10 +28203,12 @@
             </a:r>
           </a:p>
           <a:p>
-            <a:pPr>
+            <a:pPr lvl="0" marL="457200" indent="-228600">
+              <a:buFont typeface="Calibri"/>
               <a:spcAft>
                 <a:spcPts val="1000"/>
               </a:spcAft>
+              <a:buSzPct val="100000"/>
               <a:buChar char="•"/>
               <a:lnSpc>
                 <a:spcPts val="2200"/>
@@ -27689,10 +28225,12 @@
             </a:r>
           </a:p>
           <a:p>
-            <a:pPr>
+            <a:pPr lvl="0" marL="457200" indent="-228600">
+              <a:buFont typeface="Calibri"/>
               <a:spcAft>
                 <a:spcPts val="1000"/>
               </a:spcAft>
+              <a:buSzPct val="100000"/>
               <a:buChar char="•"/>
               <a:lnSpc>
                 <a:spcPts val="2200"/>
@@ -28120,10 +28658,12 @@
           </a:bodyPr>
           <a:lstStyle/>
           <a:p>
-            <a:pPr>
+            <a:pPr lvl="0" marL="457200" indent="-228600">
+              <a:buFont typeface="Calibri"/>
               <a:spcAft>
                 <a:spcPts val="1000"/>
               </a:spcAft>
+              <a:buSzPct val="100000"/>
               <a:buChar char="•"/>
               <a:lnSpc>
                 <a:spcPts val="2200"/>
@@ -28140,10 +28680,12 @@
             </a:r>
           </a:p>
           <a:p>
-            <a:pPr>
+            <a:pPr lvl="0" marL="457200" indent="-228600">
+              <a:buFont typeface="Calibri"/>
               <a:spcAft>
                 <a:spcPts val="1000"/>
               </a:spcAft>
+              <a:buSzPct val="100000"/>
               <a:buChar char="•"/>
               <a:lnSpc>
                 <a:spcPts val="2200"/>
@@ -28160,10 +28702,12 @@
             </a:r>
           </a:p>
           <a:p>
-            <a:pPr>
+            <a:pPr lvl="0" marL="457200" indent="-228600">
+              <a:buFont typeface="Calibri"/>
               <a:spcAft>
                 <a:spcPts val="1000"/>
               </a:spcAft>
+              <a:buSzPct val="100000"/>
               <a:buChar char="•"/>
               <a:lnSpc>
                 <a:spcPts val="2200"/>
@@ -28299,10 +28843,12 @@
           </a:bodyPr>
           <a:lstStyle/>
           <a:p>
-            <a:pPr>
+            <a:pPr lvl="0" marL="457200" indent="-228600">
+              <a:buFont typeface="Calibri"/>
               <a:spcAft>
                 <a:spcPts val="1000"/>
               </a:spcAft>
+              <a:buSzPct val="100000"/>
               <a:buChar char="•"/>
               <a:lnSpc>
                 <a:spcPts val="2200"/>
@@ -28319,10 +28865,12 @@
             </a:r>
           </a:p>
           <a:p>
-            <a:pPr>
+            <a:pPr lvl="0" marL="457200" indent="-228600">
+              <a:buFont typeface="Calibri"/>
               <a:spcAft>
                 <a:spcPts val="1000"/>
               </a:spcAft>
+              <a:buSzPct val="100000"/>
               <a:buChar char="•"/>
               <a:lnSpc>
                 <a:spcPts val="2200"/>
@@ -28339,10 +28887,12 @@
             </a:r>
           </a:p>
           <a:p>
-            <a:pPr>
+            <a:pPr lvl="0" marL="457200" indent="-228600">
+              <a:buFont typeface="Calibri"/>
               <a:spcAft>
                 <a:spcPts val="1000"/>
               </a:spcAft>
+              <a:buSzPct val="100000"/>
               <a:buChar char="•"/>
               <a:lnSpc>
                 <a:spcPts val="2200"/>
@@ -28359,10 +28909,12 @@
             </a:r>
           </a:p>
           <a:p>
-            <a:pPr>
+            <a:pPr lvl="0" marL="457200" indent="-228600">
+              <a:buFont typeface="Calibri"/>
               <a:spcAft>
                 <a:spcPts val="1000"/>
               </a:spcAft>
+              <a:buSzPct val="100000"/>
               <a:buChar char="•"/>
               <a:lnSpc>
                 <a:spcPts val="2200"/>
@@ -28885,10 +29437,12 @@
           </a:bodyPr>
           <a:lstStyle/>
           <a:p>
-            <a:pPr>
+            <a:pPr lvl="0" marL="457200" indent="-228600">
+              <a:buFont typeface="Calibri"/>
               <a:spcAft>
                 <a:spcPts val="1000"/>
               </a:spcAft>
+              <a:buSzPct val="100000"/>
               <a:buChar char="•"/>
               <a:lnSpc>
                 <a:spcPts val="2200"/>
@@ -28905,10 +29459,12 @@
             </a:r>
           </a:p>
           <a:p>
-            <a:pPr>
+            <a:pPr lvl="0" marL="457200" indent="-228600">
+              <a:buFont typeface="Calibri"/>
               <a:spcAft>
                 <a:spcPts val="1000"/>
               </a:spcAft>
+              <a:buSzPct val="100000"/>
               <a:buChar char="•"/>
               <a:lnSpc>
                 <a:spcPts val="2200"/>
@@ -29044,10 +29600,12 @@
           </a:bodyPr>
           <a:lstStyle/>
           <a:p>
-            <a:pPr>
+            <a:pPr lvl="0" marL="457200" indent="-228600">
+              <a:buFont typeface="Calibri"/>
               <a:spcAft>
                 <a:spcPts val="1000"/>
               </a:spcAft>
+              <a:buSzPct val="100000"/>
               <a:buChar char="•"/>
               <a:lnSpc>
                 <a:spcPts val="2200"/>
@@ -29064,10 +29622,12 @@
             </a:r>
           </a:p>
           <a:p>
-            <a:pPr>
+            <a:pPr lvl="0" marL="457200" indent="-228600">
+              <a:buFont typeface="Calibri"/>
               <a:spcAft>
                 <a:spcPts val="1000"/>
               </a:spcAft>
+              <a:buSzPct val="100000"/>
               <a:buChar char="•"/>
               <a:lnSpc>
                 <a:spcPts val="2200"/>
@@ -29084,10 +29644,12 @@
             </a:r>
           </a:p>
           <a:p>
-            <a:pPr>
+            <a:pPr lvl="0" marL="457200" indent="-228600">
+              <a:buFont typeface="Calibri"/>
               <a:spcAft>
                 <a:spcPts val="1000"/>
               </a:spcAft>
+              <a:buSzPct val="100000"/>
               <a:buChar char="•"/>
               <a:lnSpc>
                 <a:spcPts val="2200"/>
@@ -29104,10 +29666,12 @@
             </a:r>
           </a:p>
           <a:p>
-            <a:pPr>
+            <a:pPr lvl="0" marL="457200" indent="-228600">
+              <a:buFont typeface="Calibri"/>
               <a:spcAft>
                 <a:spcPts val="1000"/>
               </a:spcAft>
+              <a:buSzPct val="100000"/>
               <a:buChar char="•"/>
               <a:lnSpc>
                 <a:spcPts val="2200"/>
